--- a/yocto_training_all_session_decks/session_decks/D4S5_Performance.pptx
+++ b/yocto_training_all_session_decks/session_decks/D4S5_Performance.pptx
@@ -5,26 +5,26 @@
     <p:sldMasterId id="2147483648" r:id="rId1"/>
   </p:sldMasterIdLst>
   <p:notesMasterIdLst>
-    <p:notesMasterId r:id="rId8"/>
+    <p:notesMasterId r:id="rId11"/>
   </p:notesMasterIdLst>
   <p:handoutMasterIdLst>
-    <p:handoutMasterId r:id="rId9"/>
+    <p:handoutMasterId r:id="rId12"/>
   </p:handoutMasterIdLst>
   <p:sldIdLst>
-    <p:sldId id="1007" r:id="rId18"/>
-    <p:sldId id="1008" r:id="rId19"/>
-    <p:sldId id="1009" r:id="rId20"/>
-    <p:sldId id="1010" r:id="rId21"/>
-    <p:sldId id="1011" r:id="rId22"/>
-    <p:sldId id="1012" r:id="rId23"/>
-    <p:sldId id="1013" r:id="rId24"/>
-    <p:sldId id="1014" r:id="rId25"/>
-    <p:sldId id="1015" r:id="rId26"/>
+    <p:sldId id="1007" r:id="rId2"/>
+    <p:sldId id="1008" r:id="rId3"/>
+    <p:sldId id="1009" r:id="rId4"/>
+    <p:sldId id="1010" r:id="rId5"/>
+    <p:sldId id="1011" r:id="rId6"/>
+    <p:sldId id="1012" r:id="rId7"/>
+    <p:sldId id="1013" r:id="rId8"/>
+    <p:sldId id="1014" r:id="rId9"/>
+    <p:sldId id="1015" r:id="rId10"/>
   </p:sldIdLst>
   <p:sldSz cx="12192000" cy="6858000"/>
   <p:notesSz cx="6858000" cy="9144000"/>
   <p:custDataLst>
-    <p:tags r:id="rId10"/>
+    <p:tags r:id="rId13"/>
   </p:custDataLst>
   <p:defaultTextStyle>
     <a:defPPr>
@@ -2930,7 +2930,7 @@
           <a:p>
             <a:fld id="{0CEC647C-F50C-4F78-AA33-D7AA6CDA18EE}" type="datetimeFigureOut">
               <a:rPr lang="en-US" smtClean="0"/>
-              <a:t>7/13/2025</a:t>
+              <a:t>6/12/2026</a:t>
             </a:fld>
             <a:endParaRPr lang="en-US"/>
           </a:p>
@@ -3095,7 +3095,7 @@
           <a:p>
             <a:fld id="{3A83341F-E62C-483B-84B4-966F8BE46097}" type="datetimeFigureOut">
               <a:rPr lang="en-US" smtClean="0"/>
-              <a:t>7/13/2025</a:t>
+              <a:t>6/12/2026</a:t>
             </a:fld>
             <a:endParaRPr lang="en-US"/>
           </a:p>
@@ -5179,8 +5179,8 @@
 </p:sldMaster>
 </file>
 
-<file path=ppt/slides/slide10.xml><?xml version="1.0" encoding="utf-8"?>
-<p:sld xmlns:a="http://schemas.openxmlformats.org/drawingml/2006/main" xmlns:p="http://schemas.openxmlformats.org/presentationml/2006/main" xmlns:r="http://schemas.openxmlformats.org/officeDocument/2006/relationships">
+<file path=ppt/slides/slide1.xml><?xml version="1.0" encoding="utf-8"?>
+<p:sld xmlns:a="http://schemas.openxmlformats.org/drawingml/2006/main" xmlns:r="http://schemas.openxmlformats.org/officeDocument/2006/relationships" xmlns:p="http://schemas.openxmlformats.org/presentationml/2006/main">
   <p:cSld>
     <p:spTree>
       <p:nvGrpSpPr>
@@ -5188,7 +5188,102 @@
         <p:cNvGrpSpPr/>
         <p:nvPr/>
       </p:nvGrpSpPr>
-      <p:grpSpPr/>
+      <p:grpSpPr>
+        <a:xfrm>
+          <a:off x="0" y="0"/>
+          <a:ext cx="0" cy="0"/>
+          <a:chOff x="0" y="0"/>
+          <a:chExt cx="0" cy="0"/>
+        </a:xfrm>
+      </p:grpSpPr>
+      <p:sp>
+        <p:nvSpPr>
+          <p:cNvPr id="2" name="Title 1"/>
+          <p:cNvSpPr>
+            <a:spLocks noGrp="1"/>
+          </p:cNvSpPr>
+          <p:nvPr>
+            <p:ph type="ctrTitle"/>
+          </p:nvPr>
+        </p:nvSpPr>
+        <p:spPr/>
+        <p:txBody>
+          <a:bodyPr/>
+          <a:lstStyle/>
+          <a:p>
+            <a:r>
+              <a:rPr sz="4400" b="1">
+                <a:solidFill>
+                  <a:srgbClr val="FFFFFF"/>
+                </a:solidFill>
+                <a:latin typeface="Calibri"/>
+              </a:rPr>
+              <a:t>Performance on Target</a:t>
+            </a:r>
+          </a:p>
+        </p:txBody>
+      </p:sp>
+      <p:sp>
+        <p:nvSpPr>
+          <p:cNvPr id="3" name="Subtitle 2"/>
+          <p:cNvSpPr>
+            <a:spLocks noGrp="1"/>
+          </p:cNvSpPr>
+          <p:nvPr>
+            <p:ph type="subTitle" idx="1"/>
+          </p:nvPr>
+        </p:nvSpPr>
+        <p:spPr/>
+        <p:txBody>
+          <a:bodyPr/>
+          <a:lstStyle/>
+          <a:p>
+            <a:r>
+              <a:rPr sz="1800">
+                <a:solidFill>
+                  <a:srgbClr val="FFFFFF"/>
+                </a:solidFill>
+                <a:latin typeface="Calibri"/>
+              </a:rPr>
+              <a:t>Boot </a:t>
+            </a:r>
+            <a:r>
+              <a:rPr sz="1800" dirty="0">
+                <a:solidFill>
+                  <a:srgbClr val="FFFFFF"/>
+                </a:solidFill>
+                <a:latin typeface="Calibri"/>
+              </a:rPr>
+              <a:t>time, memory, CPU, IO</a:t>
+            </a:r>
+          </a:p>
+        </p:txBody>
+      </p:sp>
+    </p:spTree>
+  </p:cSld>
+  <p:clrMapOvr>
+    <a:masterClrMapping/>
+  </p:clrMapOvr>
+</p:sld>
+</file>
+
+<file path=ppt/slides/slide2.xml><?xml version="1.0" encoding="utf-8"?>
+<p:sld xmlns:a="http://schemas.openxmlformats.org/drawingml/2006/main" xmlns:r="http://schemas.openxmlformats.org/officeDocument/2006/relationships" xmlns:p="http://schemas.openxmlformats.org/presentationml/2006/main">
+  <p:cSld>
+    <p:spTree>
+      <p:nvGrpSpPr>
+        <p:cNvPr id="1" name=""/>
+        <p:cNvGrpSpPr/>
+        <p:nvPr/>
+      </p:nvGrpSpPr>
+      <p:grpSpPr>
+        <a:xfrm>
+          <a:off x="0" y="0"/>
+          <a:ext cx="0" cy="0"/>
+          <a:chOff x="0" y="0"/>
+          <a:chExt cx="0" cy="0"/>
+        </a:xfrm>
+      </p:grpSpPr>
       <p:sp>
         <p:nvSpPr>
           <p:cNvPr id="2" name="Title 1"/>
@@ -5211,7 +5306,178 @@
                 </a:solidFill>
                 <a:latin typeface="Calibri"/>
               </a:rPr>
-              <a:t>Boot Time — Common Levers</a:t>
+              <a:t>Session Agenda</a:t>
+            </a:r>
+          </a:p>
+        </p:txBody>
+      </p:sp>
+      <p:sp>
+        <p:nvSpPr>
+          <p:cNvPr id="3" name="TextBox 2"/>
+          <p:cNvSpPr txBox="1"/>
+          <p:nvPr/>
+        </p:nvSpPr>
+        <p:spPr>
+          <a:xfrm>
+            <a:off x="822960" y="1463040"/>
+            <a:ext cx="10515600" cy="5029200"/>
+          </a:xfrm>
+          <a:prstGeom prst="rect">
+            <a:avLst/>
+          </a:prstGeom>
+          <a:noFill/>
+        </p:spPr>
+        <p:txBody>
+          <a:bodyPr wrap="square" lIns="45720" rIns="45720">
+            <a:spAutoFit/>
+          </a:bodyPr>
+          <a:lstStyle/>
+          <a:p>
+            <a:pPr>
+              <a:spcAft>
+                <a:spcPts val="600"/>
+              </a:spcAft>
+            </a:pPr>
+            <a:r>
+              <a:rPr sz="2000" b="0" i="0">
+                <a:solidFill>
+                  <a:srgbClr val="333333"/>
+                </a:solidFill>
+                <a:latin typeface="Calibri"/>
+              </a:rPr>
+              <a:t>1.  Boot time — measure with systemd-analyze</a:t>
+            </a:r>
+          </a:p>
+          <a:p>
+            <a:pPr>
+              <a:spcAft>
+                <a:spcPts val="600"/>
+              </a:spcAft>
+            </a:pPr>
+            <a:r>
+              <a:rPr sz="2000" b="0" i="0">
+                <a:solidFill>
+                  <a:srgbClr val="333333"/>
+                </a:solidFill>
+                <a:latin typeface="Calibri"/>
+              </a:rPr>
+              <a:t>2.  Boot time — common levers and what each gives you</a:t>
+            </a:r>
+          </a:p>
+          <a:p>
+            <a:pPr>
+              <a:spcAft>
+                <a:spcPts val="600"/>
+              </a:spcAft>
+            </a:pPr>
+            <a:r>
+              <a:rPr sz="2000" b="0" i="0">
+                <a:solidFill>
+                  <a:srgbClr val="333333"/>
+                </a:solidFill>
+                <a:latin typeface="Calibri"/>
+              </a:rPr>
+              <a:t>3.  Memory footprint — free, smem, ps</a:t>
+            </a:r>
+          </a:p>
+          <a:p>
+            <a:pPr>
+              <a:spcAft>
+                <a:spcPts val="600"/>
+              </a:spcAft>
+            </a:pPr>
+            <a:r>
+              <a:rPr sz="2000" b="0" i="0">
+                <a:solidFill>
+                  <a:srgbClr val="333333"/>
+                </a:solidFill>
+                <a:latin typeface="Calibri"/>
+              </a:rPr>
+              <a:t>4.  CPU utilization — top, mpstat, perf</a:t>
+            </a:r>
+          </a:p>
+          <a:p>
+            <a:pPr>
+              <a:spcAft>
+                <a:spcPts val="600"/>
+              </a:spcAft>
+            </a:pPr>
+            <a:r>
+              <a:rPr sz="2000" b="0" i="0">
+                <a:solidFill>
+                  <a:srgbClr val="333333"/>
+                </a:solidFill>
+                <a:latin typeface="Calibri"/>
+              </a:rPr>
+              <a:t>5.  I/O bottlenecks — iotop, iostat</a:t>
+            </a:r>
+          </a:p>
+          <a:p>
+            <a:pPr>
+              <a:spcAft>
+                <a:spcPts val="600"/>
+              </a:spcAft>
+            </a:pPr>
+            <a:r>
+              <a:rPr sz="2000" b="0" i="0">
+                <a:solidFill>
+                  <a:srgbClr val="333333"/>
+                </a:solidFill>
+                <a:latin typeface="Calibri"/>
+              </a:rPr>
+              <a:t>6.  Hands-on measurement on TrainerGW</a:t>
+            </a:r>
+          </a:p>
+        </p:txBody>
+      </p:sp>
+    </p:spTree>
+  </p:cSld>
+  <p:clrMapOvr>
+    <a:masterClrMapping/>
+  </p:clrMapOvr>
+</p:sld>
+</file>
+
+<file path=ppt/slides/slide3.xml><?xml version="1.0" encoding="utf-8"?>
+<p:sld xmlns:a="http://schemas.openxmlformats.org/drawingml/2006/main" xmlns:r="http://schemas.openxmlformats.org/officeDocument/2006/relationships" xmlns:p="http://schemas.openxmlformats.org/presentationml/2006/main">
+  <p:cSld>
+    <p:spTree>
+      <p:nvGrpSpPr>
+        <p:cNvPr id="1" name=""/>
+        <p:cNvGrpSpPr/>
+        <p:nvPr/>
+      </p:nvGrpSpPr>
+      <p:grpSpPr>
+        <a:xfrm>
+          <a:off x="0" y="0"/>
+          <a:ext cx="0" cy="0"/>
+          <a:chOff x="0" y="0"/>
+          <a:chExt cx="0" cy="0"/>
+        </a:xfrm>
+      </p:grpSpPr>
+      <p:sp>
+        <p:nvSpPr>
+          <p:cNvPr id="2" name="Title 1"/>
+          <p:cNvSpPr>
+            <a:spLocks noGrp="1"/>
+          </p:cNvSpPr>
+          <p:nvPr>
+            <p:ph type="title"/>
+          </p:nvPr>
+        </p:nvSpPr>
+        <p:spPr/>
+        <p:txBody>
+          <a:bodyPr/>
+          <a:lstStyle/>
+          <a:p>
+            <a:r>
+              <a:rPr sz="3200" b="1">
+                <a:solidFill>
+                  <a:srgbClr val="CC0066"/>
+                </a:solidFill>
+                <a:latin typeface="Calibri"/>
+              </a:rPr>
+              <a:t>Boot Time — Measurement</a:t>
             </a:r>
           </a:p>
         </p:txBody>
@@ -5233,7 +5499,7 @@
           <a:noFill/>
         </p:spPr>
         <p:txBody>
-          <a:bodyPr wrap="square" anchor="t" lIns="45720" rIns="45720">
+          <a:bodyPr wrap="square" lIns="45720" rIns="45720" anchor="t">
             <a:spAutoFit/>
           </a:bodyPr>
           <a:lstStyle/>
@@ -5246,270 +5512,7 @@
                 </a:solidFill>
                 <a:latin typeface="Calibri"/>
               </a:rPr>
-              <a:t>What each lever gives you on a typical device.</a:t>
-            </a:r>
-          </a:p>
-        </p:txBody>
-      </p:sp>
-      <p:sp>
-        <p:nvSpPr>
-          <p:cNvPr id="4" name="TextBox 3"/>
-          <p:cNvSpPr txBox="1"/>
-          <p:nvPr/>
-        </p:nvSpPr>
-        <p:spPr>
-          <a:xfrm>
-            <a:off x="822960" y="1783080"/>
-            <a:ext cx="10515600" cy="4572000"/>
-          </a:xfrm>
-          <a:prstGeom prst="rect">
-            <a:avLst/>
-          </a:prstGeom>
-          <a:noFill/>
-        </p:spPr>
-        <p:txBody>
-          <a:bodyPr wrap="square" lIns="45720" rIns="45720">
-            <a:spAutoFit/>
-          </a:bodyPr>
-          <a:lstStyle/>
-          <a:p>
-            <a:pPr>
-              <a:spcAft>
-                <a:spcPts val="400"/>
-              </a:spcAft>
-            </a:pPr>
-            <a:r>
-              <a:rPr sz="1500" b="1" i="0">
-                <a:solidFill>
-                  <a:srgbClr val="CC0066"/>
-                </a:solidFill>
-                <a:latin typeface="Calibri"/>
-              </a:rPr>
-              <a:t>Lever 1: Disable services you don't need</a:t>
-            </a:r>
-          </a:p>
-          <a:p>
-            <a:pPr>
-              <a:spcAft>
-                <a:spcPts val="800"/>
-              </a:spcAft>
-            </a:pPr>
-            <a:r>
-              <a:rPr sz="1300" b="0" i="0">
-                <a:solidFill>
-                  <a:srgbClr val="333333"/>
-                </a:solidFill>
-                <a:latin typeface="Calibri"/>
-              </a:rPr>
-              <a:t>systemctl disable &lt;service&gt;  — savings: 0.5–3 seconds depending on service</a:t>
-            </a:r>
-          </a:p>
-          <a:p>
-            <a:pPr>
-              <a:spcAft>
-                <a:spcPts val="400"/>
-              </a:spcAft>
-            </a:pPr>
-            <a:r>
-              <a:rPr sz="1500" b="1" i="0">
-                <a:solidFill>
-                  <a:srgbClr val="CC0066"/>
-                </a:solidFill>
-                <a:latin typeface="Calibri"/>
-              </a:rPr>
-              <a:t>Lever 2: Strip kernel debug info</a:t>
-            </a:r>
-          </a:p>
-          <a:p>
-            <a:pPr>
-              <a:spcAft>
-                <a:spcPts val="800"/>
-              </a:spcAft>
-            </a:pPr>
-            <a:r>
-              <a:rPr sz="1300" b="0" i="0">
-                <a:solidFill>
-                  <a:srgbClr val="333333"/>
-                </a:solidFill>
-                <a:latin typeface="Calibri"/>
-              </a:rPr>
-              <a:t>CONFIG_DEBUG_INFO=n, CONFIG_DEBUG_INFO_DWARF_TOOLCHAIN_DEFAULT=n — kernel ~50% smaller, ~50–100 ms faster</a:t>
-            </a:r>
-          </a:p>
-          <a:p>
-            <a:pPr>
-              <a:spcAft>
-                <a:spcPts val="400"/>
-              </a:spcAft>
-            </a:pPr>
-            <a:r>
-              <a:rPr sz="1500" b="1" i="0">
-                <a:solidFill>
-                  <a:srgbClr val="CC0066"/>
-                </a:solidFill>
-                <a:latin typeface="Calibri"/>
-              </a:rPr>
-              <a:t>Lever 3: Drop initramfs if you can</a:t>
-            </a:r>
-          </a:p>
-          <a:p>
-            <a:pPr>
-              <a:spcAft>
-                <a:spcPts val="800"/>
-              </a:spcAft>
-            </a:pPr>
-            <a:r>
-              <a:rPr sz="1300" b="0" i="0">
-                <a:solidFill>
-                  <a:srgbClr val="333333"/>
-                </a:solidFill>
-                <a:latin typeface="Calibri"/>
-              </a:rPr>
-              <a:t>Mount rootfs directly — savings: 200–500 ms (depending on initramfs size)</a:t>
-            </a:r>
-          </a:p>
-          <a:p>
-            <a:pPr>
-              <a:spcAft>
-                <a:spcPts val="400"/>
-              </a:spcAft>
-            </a:pPr>
-            <a:r>
-              <a:rPr sz="1500" b="1" i="0">
-                <a:solidFill>
-                  <a:srgbClr val="CC0066"/>
-                </a:solidFill>
-                <a:latin typeface="Calibri"/>
-              </a:rPr>
-              <a:t>Lever 4: quiet boot + earlycon</a:t>
-            </a:r>
-          </a:p>
-          <a:p>
-            <a:pPr>
-              <a:spcAft>
-                <a:spcPts val="800"/>
-              </a:spcAft>
-            </a:pPr>
-            <a:r>
-              <a:rPr sz="1200" b="0" i="0">
-                <a:solidFill>
-                  <a:srgbClr val="333333"/>
-                </a:solidFill>
-                <a:latin typeface="Consolas"/>
-              </a:rPr>
-              <a:t>bootargs += "quiet loglevel=4 earlycon"  — saves serial I/O time, 100–200 ms typical</a:t>
-            </a:r>
-          </a:p>
-          <a:p>
-            <a:pPr>
-              <a:spcAft>
-                <a:spcPts val="400"/>
-              </a:spcAft>
-            </a:pPr>
-            <a:r>
-              <a:rPr sz="1500" b="1" i="0">
-                <a:solidFill>
-                  <a:srgbClr val="CC0066"/>
-                </a:solidFill>
-                <a:latin typeface="Calibri"/>
-              </a:rPr>
-              <a:t>Lever 5: Replace bash with dash for early scripts</a:t>
-            </a:r>
-          </a:p>
-          <a:p>
-            <a:pPr>
-              <a:spcAft>
-                <a:spcPts val="400"/>
-              </a:spcAft>
-            </a:pPr>
-            <a:r>
-              <a:rPr sz="1300" b="0" i="0">
-                <a:solidFill>
-                  <a:srgbClr val="333333"/>
-                </a:solidFill>
-                <a:latin typeface="Calibri"/>
-              </a:rPr>
-              <a:t>In Yocto: VIRTUAL-RUNTIME_base-utils-syslog = "dash"; init scripts much faster</a:t>
-            </a:r>
-          </a:p>
-        </p:txBody>
-      </p:sp>
-    </p:spTree>
-  </p:cSld>
-  <p:clrMapOvr>
-    <a:masterClrMapping/>
-  </p:clrMapOvr>
-</p:sld>
-</file>
-
-<file path=ppt/slides/slide11.xml><?xml version="1.0" encoding="utf-8"?>
-<p:sld xmlns:a="http://schemas.openxmlformats.org/drawingml/2006/main" xmlns:p="http://schemas.openxmlformats.org/presentationml/2006/main" xmlns:r="http://schemas.openxmlformats.org/officeDocument/2006/relationships">
-  <p:cSld>
-    <p:spTree>
-      <p:nvGrpSpPr>
-        <p:cNvPr id="1" name=""/>
-        <p:cNvGrpSpPr/>
-        <p:nvPr/>
-      </p:nvGrpSpPr>
-      <p:grpSpPr/>
-      <p:sp>
-        <p:nvSpPr>
-          <p:cNvPr id="2" name="Title 1"/>
-          <p:cNvSpPr>
-            <a:spLocks noGrp="1"/>
-          </p:cNvSpPr>
-          <p:nvPr>
-            <p:ph type="title"/>
-          </p:nvPr>
-        </p:nvSpPr>
-        <p:spPr/>
-        <p:txBody>
-          <a:bodyPr/>
-          <a:lstStyle/>
-          <a:p>
-            <a:r>
-              <a:rPr sz="3200" b="1">
-                <a:solidFill>
-                  <a:srgbClr val="CC0066"/>
-                </a:solidFill>
-                <a:latin typeface="Calibri"/>
-              </a:rPr>
-              <a:t>Memory Footprint</a:t>
-            </a:r>
-          </a:p>
-        </p:txBody>
-      </p:sp>
-      <p:sp>
-        <p:nvSpPr>
-          <p:cNvPr id="3" name="TextBox 2"/>
-          <p:cNvSpPr txBox="1"/>
-          <p:nvPr/>
-        </p:nvSpPr>
-        <p:spPr>
-          <a:xfrm>
-            <a:off x="822960" y="1417320"/>
-            <a:ext cx="10515600" cy="365760"/>
-          </a:xfrm>
-          <a:prstGeom prst="rect">
-            <a:avLst/>
-          </a:prstGeom>
-          <a:noFill/>
-        </p:spPr>
-        <p:txBody>
-          <a:bodyPr wrap="square" anchor="t" lIns="45720" rIns="45720">
-            <a:spAutoFit/>
-          </a:bodyPr>
-          <a:lstStyle/>
-          <a:p>
-            <a:pPr algn="l"/>
-            <a:r>
-              <a:rPr sz="1500" b="0" i="1">
-                <a:solidFill>
-                  <a:srgbClr val="666666"/>
-                </a:solidFill>
-                <a:latin typeface="Calibri"/>
-              </a:rPr>
-              <a:t>What's using your RAM, and is it justified?</a:t>
+              <a:t>First, know what you're optimizing.</a:t>
             </a:r>
           </a:p>
         </p:txBody>
@@ -5557,6 +5560,7 @@
           <a:lstStyle/>
           <a:p>
             <a:pPr algn="ctr"/>
+            <a:endParaRPr/>
           </a:p>
         </p:txBody>
       </p:sp>
@@ -5601,6 +5605,7 @@
           <a:lstStyle/>
           <a:p>
             <a:pPr algn="ctr"/>
+            <a:endParaRPr/>
           </a:p>
         </p:txBody>
       </p:sp>
@@ -5638,7 +5643,7 @@
                 </a:solidFill>
                 <a:latin typeface="Consolas"/>
               </a:rPr>
-              <a:t># Overall</a:t>
+              <a:t># Overall boot time</a:t>
             </a:r>
           </a:p>
           <a:p>
@@ -5654,7 +5659,7 @@
                 </a:solidFill>
                 <a:latin typeface="Consolas"/>
               </a:rPr>
-              <a:t>free -h</a:t>
+              <a:t>systemd-analyze</a:t>
             </a:r>
           </a:p>
           <a:p>
@@ -5670,7 +5675,7 @@
                 </a:solidFill>
                 <a:latin typeface="Consolas"/>
               </a:rPr>
-              <a:t>#               total        used        free      shared  buff/cache   available</a:t>
+              <a:t># Startup finished in 1.234s (kernel) + 5.678s (userspace) = 6.912s</a:t>
             </a:r>
           </a:p>
           <a:p>
@@ -5686,7 +5691,7 @@
                 </a:solidFill>
                 <a:latin typeface="Consolas"/>
               </a:rPr>
-              <a:t># Mem:          992Mi       240Mi       450Mi       2.0Mi       302Mi       700Mi</a:t>
+              <a:t># multi-user.target reached after 5.678s in userspace.</a:t>
             </a:r>
           </a:p>
           <a:p>
@@ -5718,7 +5723,7 @@
                 </a:solidFill>
                 <a:latin typeface="Consolas"/>
               </a:rPr>
-              <a:t># Per-process (sorted by RSS)</a:t>
+              <a:t># What took longest in userspace</a:t>
             </a:r>
           </a:p>
           <a:p>
@@ -5734,7 +5739,71 @@
                 </a:solidFill>
                 <a:latin typeface="Consolas"/>
               </a:rPr>
-              <a:t>ps aux --sort=-rss | head</a:t>
+              <a:t>systemd-analyze blame</a:t>
+            </a:r>
+          </a:p>
+          <a:p>
+            <a:pPr>
+              <a:spcAft>
+                <a:spcPts val="0"/>
+              </a:spcAft>
+            </a:pPr>
+            <a:r>
+              <a:rPr sz="1000" i="1">
+                <a:solidFill>
+                  <a:srgbClr val="808080"/>
+                </a:solidFill>
+                <a:latin typeface="Consolas"/>
+              </a:rPr>
+              <a:t># 2.341s nginx.service</a:t>
+            </a:r>
+          </a:p>
+          <a:p>
+            <a:pPr>
+              <a:spcAft>
+                <a:spcPts val="0"/>
+              </a:spcAft>
+            </a:pPr>
+            <a:r>
+              <a:rPr sz="1000" i="1">
+                <a:solidFill>
+                  <a:srgbClr val="808080"/>
+                </a:solidFill>
+                <a:latin typeface="Consolas"/>
+              </a:rPr>
+              <a:t># 1.234s NetworkManager.service</a:t>
+            </a:r>
+          </a:p>
+          <a:p>
+            <a:pPr>
+              <a:spcAft>
+                <a:spcPts val="0"/>
+              </a:spcAft>
+            </a:pPr>
+            <a:r>
+              <a:rPr sz="1000" i="1">
+                <a:solidFill>
+                  <a:srgbClr val="808080"/>
+                </a:solidFill>
+                <a:latin typeface="Consolas"/>
+              </a:rPr>
+              <a:t># 0.876s systemd-journal-flush.service</a:t>
+            </a:r>
+          </a:p>
+          <a:p>
+            <a:pPr>
+              <a:spcAft>
+                <a:spcPts val="0"/>
+              </a:spcAft>
+            </a:pPr>
+            <a:r>
+              <a:rPr sz="1000" i="1">
+                <a:solidFill>
+                  <a:srgbClr val="808080"/>
+                </a:solidFill>
+                <a:latin typeface="Consolas"/>
+              </a:rPr>
+              <a:t># ...</a:t>
             </a:r>
           </a:p>
           <a:p>
@@ -5766,7 +5835,7 @@
                 </a:solidFill>
                 <a:latin typeface="Consolas"/>
               </a:rPr>
-              <a:t># Same but more accurate — accounts for shared pages</a:t>
+              <a:t># Critical chain — what's actually blocking boot completion</a:t>
             </a:r>
           </a:p>
           <a:p>
@@ -5782,7 +5851,23 @@
                 </a:solidFill>
                 <a:latin typeface="Consolas"/>
               </a:rPr>
-              <a:t>smem -k -s pss -r | head</a:t>
+              <a:t>systemd-analyze critical-chain</a:t>
+            </a:r>
+          </a:p>
+          <a:p>
+            <a:pPr>
+              <a:spcAft>
+                <a:spcPts val="0"/>
+              </a:spcAft>
+            </a:pPr>
+            <a:r>
+              <a:rPr sz="1000">
+                <a:solidFill>
+                  <a:srgbClr val="2D2D2D"/>
+                </a:solidFill>
+                <a:latin typeface="Consolas"/>
+              </a:rPr>
+              <a:t> </a:t>
             </a:r>
           </a:p>
           <a:p>
@@ -5798,7 +5883,23 @@
                 </a:solidFill>
                 <a:latin typeface="Consolas"/>
               </a:rPr>
-              <a:t>#   PID User     Command                         Swap      USS      PSS      RSS</a:t>
+              <a:t># Render a visual SVG plot</a:t>
+            </a:r>
+          </a:p>
+          <a:p>
+            <a:pPr>
+              <a:spcAft>
+                <a:spcPts val="0"/>
+              </a:spcAft>
+            </a:pPr>
+            <a:r>
+              <a:rPr sz="1000">
+                <a:solidFill>
+                  <a:srgbClr val="2D2D2D"/>
+                </a:solidFill>
+                <a:latin typeface="Consolas"/>
+              </a:rPr>
+              <a:t>systemd-analyze plot &gt; boot.svg</a:t>
             </a:r>
           </a:p>
           <a:p>
@@ -5814,7 +5915,7 @@
                 </a:solidFill>
                 <a:latin typeface="Consolas"/>
               </a:rPr>
-              <a:t>#  1234 root     /usr/bin/python3 my_daemon         0    15.4M    18.2M    25.6M</a:t>
+              <a:t># View on host with a browser</a:t>
             </a:r>
           </a:p>
           <a:p>
@@ -5846,7 +5947,39 @@
                 </a:solidFill>
                 <a:latin typeface="Consolas"/>
               </a:rPr>
-              <a:t># Kernel memory</a:t>
+              <a:t># Kernel-side timing per initcall</a:t>
+            </a:r>
+          </a:p>
+          <a:p>
+            <a:pPr>
+              <a:spcAft>
+                <a:spcPts val="0"/>
+              </a:spcAft>
+            </a:pPr>
+            <a:r>
+              <a:rPr sz="1000" i="1">
+                <a:solidFill>
+                  <a:srgbClr val="808080"/>
+                </a:solidFill>
+                <a:latin typeface="Consolas"/>
+              </a:rPr>
+              <a:t># Add 'initcall_debug' to bootargs in U-Boot</a:t>
+            </a:r>
+          </a:p>
+          <a:p>
+            <a:pPr>
+              <a:spcAft>
+                <a:spcPts val="0"/>
+              </a:spcAft>
+            </a:pPr>
+            <a:r>
+              <a:rPr sz="1000" i="1">
+                <a:solidFill>
+                  <a:srgbClr val="808080"/>
+                </a:solidFill>
+                <a:latin typeface="Consolas"/>
+              </a:rPr>
+              <a:t># Then on boot:</a:t>
             </a:r>
           </a:p>
           <a:p>
@@ -5862,7 +5995,7 @@
                 </a:solidFill>
                 <a:latin typeface="Consolas"/>
               </a:rPr>
-              <a:t>cat /proc/meminfo | grep -E '^(MemTotal|MemFree|Slab|KernelStack|PageTables)'</a:t>
+              <a:t>dmesg | grep 'initcall.*took'</a:t>
             </a:r>
           </a:p>
           <a:p>
@@ -5878,39 +6011,7 @@
                 </a:solidFill>
                 <a:latin typeface="Consolas"/>
               </a:rPr>
-              <a:t> </a:t>
-            </a:r>
-          </a:p>
-          <a:p>
-            <a:pPr>
-              <a:spcAft>
-                <a:spcPts val="0"/>
-              </a:spcAft>
-            </a:pPr>
-            <a:r>
-              <a:rPr sz="1000" i="1">
-                <a:solidFill>
-                  <a:srgbClr val="808080"/>
-                </a:solidFill>
-                <a:latin typeface="Consolas"/>
-              </a:rPr>
-              <a:t># What's allocating most slab</a:t>
-            </a:r>
-          </a:p>
-          <a:p>
-            <a:pPr>
-              <a:spcAft>
-                <a:spcPts val="0"/>
-              </a:spcAft>
-            </a:pPr>
-            <a:r>
-              <a:rPr sz="1000">
-                <a:solidFill>
-                  <a:srgbClr val="2D2D2D"/>
-                </a:solidFill>
-                <a:latin typeface="Consolas"/>
-              </a:rPr>
-              <a:t>cat /proc/slabinfo | sort -k 3 -nr | head</a:t>
+              <a:t>dmesg | awk '/initcall.*took/ {print $NF, $0}' | sort -n | tail</a:t>
             </a:r>
           </a:p>
         </p:txBody>
@@ -5923,8 +6024,8 @@
 </p:sld>
 </file>
 
-<file path=ppt/slides/slide12.xml><?xml version="1.0" encoding="utf-8"?>
-<p:sld xmlns:a="http://schemas.openxmlformats.org/drawingml/2006/main" xmlns:p="http://schemas.openxmlformats.org/presentationml/2006/main" xmlns:r="http://schemas.openxmlformats.org/officeDocument/2006/relationships">
+<file path=ppt/slides/slide4.xml><?xml version="1.0" encoding="utf-8"?>
+<p:sld xmlns:a="http://schemas.openxmlformats.org/drawingml/2006/main" xmlns:r="http://schemas.openxmlformats.org/officeDocument/2006/relationships" xmlns:p="http://schemas.openxmlformats.org/presentationml/2006/main">
   <p:cSld>
     <p:spTree>
       <p:nvGrpSpPr>
@@ -5932,7 +6033,14 @@
         <p:cNvGrpSpPr/>
         <p:nvPr/>
       </p:nvGrpSpPr>
-      <p:grpSpPr/>
+      <p:grpSpPr>
+        <a:xfrm>
+          <a:off x="0" y="0"/>
+          <a:ext cx="0" cy="0"/>
+          <a:chOff x="0" y="0"/>
+          <a:chExt cx="0" cy="0"/>
+        </a:xfrm>
+      </p:grpSpPr>
       <p:sp>
         <p:nvSpPr>
           <p:cNvPr id="2" name="Title 1"/>
@@ -5955,7 +6063,7 @@
                 </a:solidFill>
                 <a:latin typeface="Calibri"/>
               </a:rPr>
-              <a:t>CPU Utilization</a:t>
+              <a:t>Boot Time — Common Levers</a:t>
             </a:r>
           </a:p>
         </p:txBody>
@@ -5977,7 +6085,7 @@
           <a:noFill/>
         </p:spPr>
         <p:txBody>
-          <a:bodyPr wrap="square" anchor="t" lIns="45720" rIns="45720">
+          <a:bodyPr wrap="square" lIns="45720" rIns="45720" anchor="t">
             <a:spAutoFit/>
           </a:bodyPr>
           <a:lstStyle/>
@@ -5990,7 +6098,277 @@
                 </a:solidFill>
                 <a:latin typeface="Calibri"/>
               </a:rPr>
-              <a:t>Find what's actually using your cores.</a:t>
+              <a:t>What each lever gives you on a typical device.</a:t>
+            </a:r>
+          </a:p>
+        </p:txBody>
+      </p:sp>
+      <p:sp>
+        <p:nvSpPr>
+          <p:cNvPr id="4" name="TextBox 3"/>
+          <p:cNvSpPr txBox="1"/>
+          <p:nvPr/>
+        </p:nvSpPr>
+        <p:spPr>
+          <a:xfrm>
+            <a:off x="822960" y="1783080"/>
+            <a:ext cx="10515600" cy="4572000"/>
+          </a:xfrm>
+          <a:prstGeom prst="rect">
+            <a:avLst/>
+          </a:prstGeom>
+          <a:noFill/>
+        </p:spPr>
+        <p:txBody>
+          <a:bodyPr wrap="square" lIns="45720" rIns="45720">
+            <a:spAutoFit/>
+          </a:bodyPr>
+          <a:lstStyle/>
+          <a:p>
+            <a:pPr>
+              <a:spcAft>
+                <a:spcPts val="400"/>
+              </a:spcAft>
+            </a:pPr>
+            <a:r>
+              <a:rPr sz="1500" b="1" i="0">
+                <a:solidFill>
+                  <a:srgbClr val="CC0066"/>
+                </a:solidFill>
+                <a:latin typeface="Calibri"/>
+              </a:rPr>
+              <a:t>Lever 1: Disable services you don't need</a:t>
+            </a:r>
+          </a:p>
+          <a:p>
+            <a:pPr>
+              <a:spcAft>
+                <a:spcPts val="800"/>
+              </a:spcAft>
+            </a:pPr>
+            <a:r>
+              <a:rPr sz="1300" b="0" i="0">
+                <a:solidFill>
+                  <a:srgbClr val="333333"/>
+                </a:solidFill>
+                <a:latin typeface="Calibri"/>
+              </a:rPr>
+              <a:t>systemctl disable &lt;service&gt;  — savings: 0.5–3 seconds depending on service</a:t>
+            </a:r>
+          </a:p>
+          <a:p>
+            <a:pPr>
+              <a:spcAft>
+                <a:spcPts val="400"/>
+              </a:spcAft>
+            </a:pPr>
+            <a:r>
+              <a:rPr sz="1500" b="1" i="0">
+                <a:solidFill>
+                  <a:srgbClr val="CC0066"/>
+                </a:solidFill>
+                <a:latin typeface="Calibri"/>
+              </a:rPr>
+              <a:t>Lever 2: Strip kernel debug info</a:t>
+            </a:r>
+          </a:p>
+          <a:p>
+            <a:pPr>
+              <a:spcAft>
+                <a:spcPts val="800"/>
+              </a:spcAft>
+            </a:pPr>
+            <a:r>
+              <a:rPr sz="1300" b="0" i="0">
+                <a:solidFill>
+                  <a:srgbClr val="333333"/>
+                </a:solidFill>
+                <a:latin typeface="Calibri"/>
+              </a:rPr>
+              <a:t>CONFIG_DEBUG_INFO=n, CONFIG_DEBUG_INFO_DWARF_TOOLCHAIN_DEFAULT=n — kernel ~50% smaller, ~50–100 ms faster</a:t>
+            </a:r>
+          </a:p>
+          <a:p>
+            <a:pPr>
+              <a:spcAft>
+                <a:spcPts val="400"/>
+              </a:spcAft>
+            </a:pPr>
+            <a:r>
+              <a:rPr sz="1500" b="1" i="0">
+                <a:solidFill>
+                  <a:srgbClr val="CC0066"/>
+                </a:solidFill>
+                <a:latin typeface="Calibri"/>
+              </a:rPr>
+              <a:t>Lever 3: Drop initramfs if you can</a:t>
+            </a:r>
+          </a:p>
+          <a:p>
+            <a:pPr>
+              <a:spcAft>
+                <a:spcPts val="800"/>
+              </a:spcAft>
+            </a:pPr>
+            <a:r>
+              <a:rPr sz="1300" b="0" i="0">
+                <a:solidFill>
+                  <a:srgbClr val="333333"/>
+                </a:solidFill>
+                <a:latin typeface="Calibri"/>
+              </a:rPr>
+              <a:t>Mount rootfs directly — savings: 200–500 ms (depending on initramfs size)</a:t>
+            </a:r>
+          </a:p>
+          <a:p>
+            <a:pPr>
+              <a:spcAft>
+                <a:spcPts val="400"/>
+              </a:spcAft>
+            </a:pPr>
+            <a:r>
+              <a:rPr sz="1500" b="1" i="0">
+                <a:solidFill>
+                  <a:srgbClr val="CC0066"/>
+                </a:solidFill>
+                <a:latin typeface="Calibri"/>
+              </a:rPr>
+              <a:t>Lever 4: quiet boot + earlycon</a:t>
+            </a:r>
+          </a:p>
+          <a:p>
+            <a:pPr>
+              <a:spcAft>
+                <a:spcPts val="800"/>
+              </a:spcAft>
+            </a:pPr>
+            <a:r>
+              <a:rPr sz="1200" b="0" i="0">
+                <a:solidFill>
+                  <a:srgbClr val="333333"/>
+                </a:solidFill>
+                <a:latin typeface="Consolas"/>
+              </a:rPr>
+              <a:t>bootargs += "quiet loglevel=4 earlycon"  — saves serial I/O time, 100–200 ms typical</a:t>
+            </a:r>
+          </a:p>
+          <a:p>
+            <a:pPr>
+              <a:spcAft>
+                <a:spcPts val="400"/>
+              </a:spcAft>
+            </a:pPr>
+            <a:r>
+              <a:rPr sz="1500" b="1" i="0">
+                <a:solidFill>
+                  <a:srgbClr val="CC0066"/>
+                </a:solidFill>
+                <a:latin typeface="Calibri"/>
+              </a:rPr>
+              <a:t>Lever 5: Replace bash with dash for early scripts</a:t>
+            </a:r>
+          </a:p>
+          <a:p>
+            <a:pPr>
+              <a:spcAft>
+                <a:spcPts val="400"/>
+              </a:spcAft>
+            </a:pPr>
+            <a:r>
+              <a:rPr sz="1300" b="0" i="0">
+                <a:solidFill>
+                  <a:srgbClr val="333333"/>
+                </a:solidFill>
+                <a:latin typeface="Calibri"/>
+              </a:rPr>
+              <a:t>In Yocto: VIRTUAL-RUNTIME_base-utils-syslog = "dash"; init scripts much faster</a:t>
+            </a:r>
+          </a:p>
+        </p:txBody>
+      </p:sp>
+    </p:spTree>
+  </p:cSld>
+  <p:clrMapOvr>
+    <a:masterClrMapping/>
+  </p:clrMapOvr>
+</p:sld>
+</file>
+
+<file path=ppt/slides/slide5.xml><?xml version="1.0" encoding="utf-8"?>
+<p:sld xmlns:a="http://schemas.openxmlformats.org/drawingml/2006/main" xmlns:r="http://schemas.openxmlformats.org/officeDocument/2006/relationships" xmlns:p="http://schemas.openxmlformats.org/presentationml/2006/main">
+  <p:cSld>
+    <p:spTree>
+      <p:nvGrpSpPr>
+        <p:cNvPr id="1" name=""/>
+        <p:cNvGrpSpPr/>
+        <p:nvPr/>
+      </p:nvGrpSpPr>
+      <p:grpSpPr>
+        <a:xfrm>
+          <a:off x="0" y="0"/>
+          <a:ext cx="0" cy="0"/>
+          <a:chOff x="0" y="0"/>
+          <a:chExt cx="0" cy="0"/>
+        </a:xfrm>
+      </p:grpSpPr>
+      <p:sp>
+        <p:nvSpPr>
+          <p:cNvPr id="2" name="Title 1"/>
+          <p:cNvSpPr>
+            <a:spLocks noGrp="1"/>
+          </p:cNvSpPr>
+          <p:nvPr>
+            <p:ph type="title"/>
+          </p:nvPr>
+        </p:nvSpPr>
+        <p:spPr/>
+        <p:txBody>
+          <a:bodyPr/>
+          <a:lstStyle/>
+          <a:p>
+            <a:r>
+              <a:rPr sz="3200" b="1">
+                <a:solidFill>
+                  <a:srgbClr val="CC0066"/>
+                </a:solidFill>
+                <a:latin typeface="Calibri"/>
+              </a:rPr>
+              <a:t>Memory Footprint</a:t>
+            </a:r>
+          </a:p>
+        </p:txBody>
+      </p:sp>
+      <p:sp>
+        <p:nvSpPr>
+          <p:cNvPr id="3" name="TextBox 2"/>
+          <p:cNvSpPr txBox="1"/>
+          <p:nvPr/>
+        </p:nvSpPr>
+        <p:spPr>
+          <a:xfrm>
+            <a:off x="822960" y="1417320"/>
+            <a:ext cx="10515600" cy="365760"/>
+          </a:xfrm>
+          <a:prstGeom prst="rect">
+            <a:avLst/>
+          </a:prstGeom>
+          <a:noFill/>
+        </p:spPr>
+        <p:txBody>
+          <a:bodyPr wrap="square" lIns="45720" rIns="45720" anchor="t">
+            <a:spAutoFit/>
+          </a:bodyPr>
+          <a:lstStyle/>
+          <a:p>
+            <a:pPr algn="l"/>
+            <a:r>
+              <a:rPr sz="1500" b="0" i="1">
+                <a:solidFill>
+                  <a:srgbClr val="666666"/>
+                </a:solidFill>
+                <a:latin typeface="Calibri"/>
+              </a:rPr>
+              <a:t>What's using your RAM, and is it justified?</a:t>
             </a:r>
           </a:p>
         </p:txBody>
@@ -6038,6 +6416,7 @@
           <a:lstStyle/>
           <a:p>
             <a:pPr algn="ctr"/>
+            <a:endParaRPr/>
           </a:p>
         </p:txBody>
       </p:sp>
@@ -6082,6 +6461,7 @@
           <a:lstStyle/>
           <a:p>
             <a:pPr algn="ctr"/>
+            <a:endParaRPr/>
           </a:p>
         </p:txBody>
       </p:sp>
@@ -6113,55 +6493,71 @@
               </a:spcAft>
             </a:pPr>
             <a:r>
-              <a:rPr sz="1100" i="1">
+              <a:rPr sz="1000" i="1">
                 <a:solidFill>
                   <a:srgbClr val="808080"/>
                 </a:solidFill>
                 <a:latin typeface="Consolas"/>
               </a:rPr>
-              <a:t># Live, sorted by CPU%</a:t>
-            </a:r>
-          </a:p>
-          <a:p>
-            <a:pPr>
-              <a:spcAft>
-                <a:spcPts val="0"/>
-              </a:spcAft>
-            </a:pPr>
-            <a:r>
-              <a:rPr sz="1100">
+              <a:t># Overall</a:t>
+            </a:r>
+          </a:p>
+          <a:p>
+            <a:pPr>
+              <a:spcAft>
+                <a:spcPts val="0"/>
+              </a:spcAft>
+            </a:pPr>
+            <a:r>
+              <a:rPr sz="1000">
                 <a:solidFill>
                   <a:srgbClr val="2D2D2D"/>
                 </a:solidFill>
                 <a:latin typeface="Consolas"/>
               </a:rPr>
-              <a:t>top</a:t>
-            </a:r>
-          </a:p>
-          <a:p>
-            <a:pPr>
-              <a:spcAft>
-                <a:spcPts val="0"/>
-              </a:spcAft>
-            </a:pPr>
-            <a:r>
-              <a:rPr sz="1100" i="1">
+              <a:t>free -h</a:t>
+            </a:r>
+          </a:p>
+          <a:p>
+            <a:pPr>
+              <a:spcAft>
+                <a:spcPts val="0"/>
+              </a:spcAft>
+            </a:pPr>
+            <a:r>
+              <a:rPr sz="1000" i="1">
                 <a:solidFill>
                   <a:srgbClr val="808080"/>
                 </a:solidFill>
                 <a:latin typeface="Consolas"/>
               </a:rPr>
-              <a:t># Press 'P' to sort by CPU, '1' to see per-core</a:t>
-            </a:r>
-          </a:p>
-          <a:p>
-            <a:pPr>
-              <a:spcAft>
-                <a:spcPts val="0"/>
-              </a:spcAft>
-            </a:pPr>
-            <a:r>
-              <a:rPr sz="1100">
+              <a:t>#               total        used        free      shared  buff/cache   available</a:t>
+            </a:r>
+          </a:p>
+          <a:p>
+            <a:pPr>
+              <a:spcAft>
+                <a:spcPts val="0"/>
+              </a:spcAft>
+            </a:pPr>
+            <a:r>
+              <a:rPr sz="1000" i="1">
+                <a:solidFill>
+                  <a:srgbClr val="808080"/>
+                </a:solidFill>
+                <a:latin typeface="Consolas"/>
+              </a:rPr>
+              <a:t># Mem:          992Mi       240Mi       450Mi       2.0Mi       302Mi       700Mi</a:t>
+            </a:r>
+          </a:p>
+          <a:p>
+            <a:pPr>
+              <a:spcAft>
+                <a:spcPts val="0"/>
+              </a:spcAft>
+            </a:pPr>
+            <a:r>
+              <a:rPr sz="1000">
                 <a:solidFill>
                   <a:srgbClr val="2D2D2D"/>
                 </a:solidFill>
@@ -6177,39 +6573,39 @@
               </a:spcAft>
             </a:pPr>
             <a:r>
-              <a:rPr sz="1100" i="1">
+              <a:rPr sz="1000" i="1">
                 <a:solidFill>
                   <a:srgbClr val="808080"/>
                 </a:solidFill>
                 <a:latin typeface="Consolas"/>
               </a:rPr>
-              <a:t># Per-process, no UI</a:t>
-            </a:r>
-          </a:p>
-          <a:p>
-            <a:pPr>
-              <a:spcAft>
-                <a:spcPts val="0"/>
-              </a:spcAft>
-            </a:pPr>
-            <a:r>
-              <a:rPr sz="1100">
+              <a:t># Per-process (sorted by RSS)</a:t>
+            </a:r>
+          </a:p>
+          <a:p>
+            <a:pPr>
+              <a:spcAft>
+                <a:spcPts val="0"/>
+              </a:spcAft>
+            </a:pPr>
+            <a:r>
+              <a:rPr sz="1000">
                 <a:solidFill>
                   <a:srgbClr val="2D2D2D"/>
                 </a:solidFill>
                 <a:latin typeface="Consolas"/>
               </a:rPr>
-              <a:t>ps aux --sort=-%cpu | head</a:t>
-            </a:r>
-          </a:p>
-          <a:p>
-            <a:pPr>
-              <a:spcAft>
-                <a:spcPts val="0"/>
-              </a:spcAft>
-            </a:pPr>
-            <a:r>
-              <a:rPr sz="1100">
+              <a:t>ps aux --sort=-rss | head</a:t>
+            </a:r>
+          </a:p>
+          <a:p>
+            <a:pPr>
+              <a:spcAft>
+                <a:spcPts val="0"/>
+              </a:spcAft>
+            </a:pPr>
+            <a:r>
+              <a:rPr sz="1000">
                 <a:solidFill>
                   <a:srgbClr val="2D2D2D"/>
                 </a:solidFill>
@@ -6225,39 +6621,71 @@
               </a:spcAft>
             </a:pPr>
             <a:r>
-              <a:rPr sz="1100" i="1">
+              <a:rPr sz="1000" i="1">
                 <a:solidFill>
                   <a:srgbClr val="808080"/>
                 </a:solidFill>
                 <a:latin typeface="Consolas"/>
               </a:rPr>
-              <a:t># Per-core utilization (need sysstat package)</a:t>
-            </a:r>
-          </a:p>
-          <a:p>
-            <a:pPr>
-              <a:spcAft>
-                <a:spcPts val="0"/>
-              </a:spcAft>
-            </a:pPr>
-            <a:r>
-              <a:rPr sz="1100">
+              <a:t># Same but more accurate — accounts for shared pages</a:t>
+            </a:r>
+          </a:p>
+          <a:p>
+            <a:pPr>
+              <a:spcAft>
+                <a:spcPts val="0"/>
+              </a:spcAft>
+            </a:pPr>
+            <a:r>
+              <a:rPr sz="1000">
                 <a:solidFill>
                   <a:srgbClr val="2D2D2D"/>
                 </a:solidFill>
                 <a:latin typeface="Consolas"/>
               </a:rPr>
-              <a:t>mpstat -P ALL 2</a:t>
-            </a:r>
-          </a:p>
-          <a:p>
-            <a:pPr>
-              <a:spcAft>
-                <a:spcPts val="0"/>
-              </a:spcAft>
-            </a:pPr>
-            <a:r>
-              <a:rPr sz="1100">
+              <a:t>smem -k -s pss -r | head</a:t>
+            </a:r>
+          </a:p>
+          <a:p>
+            <a:pPr>
+              <a:spcAft>
+                <a:spcPts val="0"/>
+              </a:spcAft>
+            </a:pPr>
+            <a:r>
+              <a:rPr sz="1000" i="1">
+                <a:solidFill>
+                  <a:srgbClr val="808080"/>
+                </a:solidFill>
+                <a:latin typeface="Consolas"/>
+              </a:rPr>
+              <a:t>#   PID User     Command                         Swap      USS      PSS      RSS</a:t>
+            </a:r>
+          </a:p>
+          <a:p>
+            <a:pPr>
+              <a:spcAft>
+                <a:spcPts val="0"/>
+              </a:spcAft>
+            </a:pPr>
+            <a:r>
+              <a:rPr sz="1000" i="1">
+                <a:solidFill>
+                  <a:srgbClr val="808080"/>
+                </a:solidFill>
+                <a:latin typeface="Consolas"/>
+              </a:rPr>
+              <a:t>#  1234 root     /usr/bin/python3 my_daemon         0    15.4M    18.2M    25.6M</a:t>
+            </a:r>
+          </a:p>
+          <a:p>
+            <a:pPr>
+              <a:spcAft>
+                <a:spcPts val="0"/>
+              </a:spcAft>
+            </a:pPr>
+            <a:r>
+              <a:rPr sz="1000">
                 <a:solidFill>
                   <a:srgbClr val="2D2D2D"/>
                 </a:solidFill>
@@ -6273,189 +6701,77 @@
               </a:spcAft>
             </a:pPr>
             <a:r>
-              <a:rPr sz="1100" i="1">
+              <a:rPr sz="1000" i="1">
                 <a:solidFill>
                   <a:srgbClr val="808080"/>
                 </a:solidFill>
                 <a:latin typeface="Consolas"/>
               </a:rPr>
-              <a:t># What's actually waiting on what</a:t>
-            </a:r>
-          </a:p>
-          <a:p>
-            <a:pPr>
-              <a:spcAft>
-                <a:spcPts val="0"/>
-              </a:spcAft>
-            </a:pPr>
-            <a:r>
-              <a:rPr sz="1100">
+              <a:t># Kernel memory</a:t>
+            </a:r>
+          </a:p>
+          <a:p>
+            <a:pPr>
+              <a:spcAft>
+                <a:spcPts val="0"/>
+              </a:spcAft>
+            </a:pPr>
+            <a:r>
+              <a:rPr sz="1000">
                 <a:solidFill>
                   <a:srgbClr val="2D2D2D"/>
                 </a:solidFill>
                 <a:latin typeface="Consolas"/>
               </a:rPr>
-              <a:t>vmstat 2</a:t>
-            </a:r>
-          </a:p>
-          <a:p>
-            <a:pPr>
-              <a:spcAft>
-                <a:spcPts val="0"/>
-              </a:spcAft>
-            </a:pPr>
-            <a:r>
-              <a:rPr sz="1100" i="1">
+              <a:t>cat /proc/meminfo | grep -E '^(MemTotal|MemFree|Slab|KernelStack|PageTables)'</a:t>
+            </a:r>
+          </a:p>
+          <a:p>
+            <a:pPr>
+              <a:spcAft>
+                <a:spcPts val="0"/>
+              </a:spcAft>
+            </a:pPr>
+            <a:r>
+              <a:rPr sz="1000">
+                <a:solidFill>
+                  <a:srgbClr val="2D2D2D"/>
+                </a:solidFill>
+                <a:latin typeface="Consolas"/>
+              </a:rPr>
+              <a:t> </a:t>
+            </a:r>
+          </a:p>
+          <a:p>
+            <a:pPr>
+              <a:spcAft>
+                <a:spcPts val="0"/>
+              </a:spcAft>
+            </a:pPr>
+            <a:r>
+              <a:rPr sz="1000" i="1">
                 <a:solidFill>
                   <a:srgbClr val="808080"/>
                 </a:solidFill>
                 <a:latin typeface="Consolas"/>
               </a:rPr>
-              <a:t># Look at 'r' (runnable) and 'b' (blocked) columns</a:t>
-            </a:r>
-          </a:p>
-          <a:p>
-            <a:pPr>
-              <a:spcAft>
-                <a:spcPts val="0"/>
-              </a:spcAft>
-            </a:pPr>
-            <a:r>
-              <a:rPr sz="1100">
+              <a:t># What's allocating most slab</a:t>
+            </a:r>
+          </a:p>
+          <a:p>
+            <a:pPr>
+              <a:spcAft>
+                <a:spcPts val="0"/>
+              </a:spcAft>
+            </a:pPr>
+            <a:r>
+              <a:rPr sz="1000">
                 <a:solidFill>
                   <a:srgbClr val="2D2D2D"/>
                 </a:solidFill>
                 <a:latin typeface="Consolas"/>
               </a:rPr>
-              <a:t> </a:t>
-            </a:r>
-          </a:p>
-          <a:p>
-            <a:pPr>
-              <a:spcAft>
-                <a:spcPts val="0"/>
-              </a:spcAft>
-            </a:pPr>
-            <a:r>
-              <a:rPr sz="1100" i="1">
-                <a:solidFill>
-                  <a:srgbClr val="808080"/>
-                </a:solidFill>
-                <a:latin typeface="Consolas"/>
-              </a:rPr>
-              <a:t># Profile a specific process</a:t>
-            </a:r>
-          </a:p>
-          <a:p>
-            <a:pPr>
-              <a:spcAft>
-                <a:spcPts val="0"/>
-              </a:spcAft>
-            </a:pPr>
-            <a:r>
-              <a:rPr sz="1100">
-                <a:solidFill>
-                  <a:srgbClr val="2D2D2D"/>
-                </a:solidFill>
-                <a:latin typeface="Consolas"/>
-              </a:rPr>
-              <a:t>perf top -p &lt;pid&gt;</a:t>
-            </a:r>
-          </a:p>
-          <a:p>
-            <a:pPr>
-              <a:spcAft>
-                <a:spcPts val="0"/>
-              </a:spcAft>
-            </a:pPr>
-            <a:r>
-              <a:rPr sz="1100">
-                <a:solidFill>
-                  <a:srgbClr val="2D2D2D"/>
-                </a:solidFill>
-                <a:latin typeface="Consolas"/>
-              </a:rPr>
-              <a:t>perf record -p &lt;pid&gt; -g sleep 10</a:t>
-            </a:r>
-          </a:p>
-          <a:p>
-            <a:pPr>
-              <a:spcAft>
-                <a:spcPts val="0"/>
-              </a:spcAft>
-            </a:pPr>
-            <a:r>
-              <a:rPr sz="1100">
-                <a:solidFill>
-                  <a:srgbClr val="2D2D2D"/>
-                </a:solidFill>
-                <a:latin typeface="Consolas"/>
-              </a:rPr>
-              <a:t>perf report</a:t>
-            </a:r>
-          </a:p>
-          <a:p>
-            <a:pPr>
-              <a:spcAft>
-                <a:spcPts val="0"/>
-              </a:spcAft>
-            </a:pPr>
-            <a:r>
-              <a:rPr sz="1100">
-                <a:solidFill>
-                  <a:srgbClr val="2D2D2D"/>
-                </a:solidFill>
-                <a:latin typeface="Consolas"/>
-              </a:rPr>
-              <a:t> </a:t>
-            </a:r>
-          </a:p>
-          <a:p>
-            <a:pPr>
-              <a:spcAft>
-                <a:spcPts val="0"/>
-              </a:spcAft>
-            </a:pPr>
-            <a:r>
-              <a:rPr sz="1100" i="1">
-                <a:solidFill>
-                  <a:srgbClr val="808080"/>
-                </a:solidFill>
-                <a:latin typeface="Consolas"/>
-              </a:rPr>
-              <a:t># What syscalls are slow</a:t>
-            </a:r>
-          </a:p>
-          <a:p>
-            <a:pPr>
-              <a:spcAft>
-                <a:spcPts val="0"/>
-              </a:spcAft>
-            </a:pPr>
-            <a:r>
-              <a:rPr sz="1100">
-                <a:solidFill>
-                  <a:srgbClr val="2D2D2D"/>
-                </a:solidFill>
-                <a:latin typeface="Consolas"/>
-              </a:rPr>
-              <a:t>strace -c -p &lt;pid&gt;</a:t>
-            </a:r>
-          </a:p>
-          <a:p>
-            <a:pPr>
-              <a:spcAft>
-                <a:spcPts val="0"/>
-              </a:spcAft>
-            </a:pPr>
-            <a:r>
-              <a:rPr sz="1100" i="1">
-                <a:solidFill>
-                  <a:srgbClr val="808080"/>
-                </a:solidFill>
-                <a:latin typeface="Consolas"/>
-              </a:rPr>
-              <a:t># Press Ctrl-C; see syscall summary</a:t>
+              <a:t>cat /proc/slabinfo | sort -k 3 -nr | head</a:t>
             </a:r>
           </a:p>
         </p:txBody>
@@ -6468,8 +6784,8 @@
 </p:sld>
 </file>
 
-<file path=ppt/slides/slide13.xml><?xml version="1.0" encoding="utf-8"?>
-<p:sld xmlns:a="http://schemas.openxmlformats.org/drawingml/2006/main" xmlns:p="http://schemas.openxmlformats.org/presentationml/2006/main" xmlns:r="http://schemas.openxmlformats.org/officeDocument/2006/relationships">
+<file path=ppt/slides/slide6.xml><?xml version="1.0" encoding="utf-8"?>
+<p:sld xmlns:a="http://schemas.openxmlformats.org/drawingml/2006/main" xmlns:r="http://schemas.openxmlformats.org/officeDocument/2006/relationships" xmlns:p="http://schemas.openxmlformats.org/presentationml/2006/main">
   <p:cSld>
     <p:spTree>
       <p:nvGrpSpPr>
@@ -6477,7 +6793,14 @@
         <p:cNvGrpSpPr/>
         <p:nvPr/>
       </p:nvGrpSpPr>
-      <p:grpSpPr/>
+      <p:grpSpPr>
+        <a:xfrm>
+          <a:off x="0" y="0"/>
+          <a:ext cx="0" cy="0"/>
+          <a:chOff x="0" y="0"/>
+          <a:chExt cx="0" cy="0"/>
+        </a:xfrm>
+      </p:grpSpPr>
       <p:sp>
         <p:nvSpPr>
           <p:cNvPr id="2" name="Title 1"/>
@@ -6500,7 +6823,7 @@
                 </a:solidFill>
                 <a:latin typeface="Calibri"/>
               </a:rPr>
-              <a:t>I/O Bottlenecks</a:t>
+              <a:t>CPU Utilization</a:t>
             </a:r>
           </a:p>
         </p:txBody>
@@ -6522,7 +6845,7 @@
           <a:noFill/>
         </p:spPr>
         <p:txBody>
-          <a:bodyPr wrap="square" anchor="t" lIns="45720" rIns="45720">
+          <a:bodyPr wrap="square" lIns="45720" rIns="45720" anchor="t">
             <a:spAutoFit/>
           </a:bodyPr>
           <a:lstStyle/>
@@ -6535,7 +6858,7 @@
                 </a:solidFill>
                 <a:latin typeface="Calibri"/>
               </a:rPr>
-              <a:t>Disk I/O is often the hidden killer on embedded.</a:t>
+              <a:t>Find what's actually using your cores.</a:t>
             </a:r>
           </a:p>
         </p:txBody>
@@ -6583,6 +6906,7 @@
           <a:lstStyle/>
           <a:p>
             <a:pPr algn="ctr"/>
+            <a:endParaRPr/>
           </a:p>
         </p:txBody>
       </p:sp>
@@ -6627,6 +6951,7 @@
           <a:lstStyle/>
           <a:p>
             <a:pPr algn="ctr"/>
+            <a:endParaRPr/>
           </a:p>
         </p:txBody>
       </p:sp>
@@ -6664,7 +6989,7 @@
                 </a:solidFill>
                 <a:latin typeface="Consolas"/>
               </a:rPr>
-              <a:t># Per-process I/O activity (sysstat or iotop)</a:t>
+              <a:t># Live, sorted by CPU%</a:t>
             </a:r>
           </a:p>
           <a:p>
@@ -6680,7 +7005,7 @@
                 </a:solidFill>
                 <a:latin typeface="Consolas"/>
               </a:rPr>
-              <a:t>iotop</a:t>
+              <a:t>top</a:t>
             </a:r>
           </a:p>
           <a:p>
@@ -6696,7 +7021,7 @@
                 </a:solidFill>
                 <a:latin typeface="Consolas"/>
               </a:rPr>
-              <a:t># Press 'o' to show only processes currently doing I/O</a:t>
+              <a:t># Press 'P' to sort by CPU, '1' to see per-core</a:t>
             </a:r>
           </a:p>
           <a:p>
@@ -6712,7 +7037,23 @@
                 </a:solidFill>
                 <a:latin typeface="Consolas"/>
               </a:rPr>
-              <a:t>iotop -a -d 5</a:t>
+              <a:t> </a:t>
+            </a:r>
+          </a:p>
+          <a:p>
+            <a:pPr>
+              <a:spcAft>
+                <a:spcPts val="0"/>
+              </a:spcAft>
+            </a:pPr>
+            <a:r>
+              <a:rPr sz="1100" i="1">
+                <a:solidFill>
+                  <a:srgbClr val="808080"/>
+                </a:solidFill>
+                <a:latin typeface="Consolas"/>
+              </a:rPr>
+              <a:t># Per-process, no UI</a:t>
             </a:r>
           </a:p>
           <a:p>
@@ -6728,6 +7069,22 @@
                 </a:solidFill>
                 <a:latin typeface="Consolas"/>
               </a:rPr>
+              <a:t>ps aux --sort=-%cpu | head</a:t>
+            </a:r>
+          </a:p>
+          <a:p>
+            <a:pPr>
+              <a:spcAft>
+                <a:spcPts val="0"/>
+              </a:spcAft>
+            </a:pPr>
+            <a:r>
+              <a:rPr sz="1100">
+                <a:solidFill>
+                  <a:srgbClr val="2D2D2D"/>
+                </a:solidFill>
+                <a:latin typeface="Consolas"/>
+              </a:rPr>
               <a:t> </a:t>
             </a:r>
           </a:p>
@@ -6744,7 +7101,7 @@
                 </a:solidFill>
                 <a:latin typeface="Consolas"/>
               </a:rPr>
-              <a:t># Device-level</a:t>
+              <a:t># Per-core utilization (need sysstat package)</a:t>
             </a:r>
           </a:p>
           <a:p>
@@ -6760,7 +7117,23 @@
                 </a:solidFill>
                 <a:latin typeface="Consolas"/>
               </a:rPr>
-              <a:t>iostat -x 2</a:t>
+              <a:t>mpstat -P ALL 2</a:t>
+            </a:r>
+          </a:p>
+          <a:p>
+            <a:pPr>
+              <a:spcAft>
+                <a:spcPts val="0"/>
+              </a:spcAft>
+            </a:pPr>
+            <a:r>
+              <a:rPr sz="1100">
+                <a:solidFill>
+                  <a:srgbClr val="2D2D2D"/>
+                </a:solidFill>
+                <a:latin typeface="Consolas"/>
+              </a:rPr>
+              <a:t> </a:t>
             </a:r>
           </a:p>
           <a:p>
@@ -6776,7 +7149,23 @@
                 </a:solidFill>
                 <a:latin typeface="Consolas"/>
               </a:rPr>
-              <a:t>#                rkB/s    wkB/s     await  %util</a:t>
+              <a:t># What's actually waiting on what</a:t>
+            </a:r>
+          </a:p>
+          <a:p>
+            <a:pPr>
+              <a:spcAft>
+                <a:spcPts val="0"/>
+              </a:spcAft>
+            </a:pPr>
+            <a:r>
+              <a:rPr sz="1100">
+                <a:solidFill>
+                  <a:srgbClr val="2D2D2D"/>
+                </a:solidFill>
+                <a:latin typeface="Consolas"/>
+              </a:rPr>
+              <a:t>vmstat 2</a:t>
             </a:r>
           </a:p>
           <a:p>
@@ -6792,7 +7181,7 @@
                 </a:solidFill>
                 <a:latin typeface="Consolas"/>
               </a:rPr>
-              <a:t># mmcblk0p2       0.50    25.4      8.20   45.2%</a:t>
+              <a:t># Look at 'r' (runnable) and 'b' (blocked) columns</a:t>
             </a:r>
           </a:p>
           <a:p>
@@ -6824,7 +7213,7 @@
                 </a:solidFill>
                 <a:latin typeface="Consolas"/>
               </a:rPr>
-              <a:t># Open files per process</a:t>
+              <a:t># Profile a specific process</a:t>
             </a:r>
           </a:p>
           <a:p>
@@ -6840,7 +7229,7 @@
                 </a:solidFill>
                 <a:latin typeface="Consolas"/>
               </a:rPr>
-              <a:t>lsof -p &lt;pid&gt; | head</a:t>
+              <a:t>perf top -p &lt;pid&gt;</a:t>
             </a:r>
           </a:p>
           <a:p>
@@ -6856,6 +7245,38 @@
                 </a:solidFill>
                 <a:latin typeface="Consolas"/>
               </a:rPr>
+              <a:t>perf record -p &lt;pid&gt; -g sleep 10</a:t>
+            </a:r>
+          </a:p>
+          <a:p>
+            <a:pPr>
+              <a:spcAft>
+                <a:spcPts val="0"/>
+              </a:spcAft>
+            </a:pPr>
+            <a:r>
+              <a:rPr sz="1100">
+                <a:solidFill>
+                  <a:srgbClr val="2D2D2D"/>
+                </a:solidFill>
+                <a:latin typeface="Consolas"/>
+              </a:rPr>
+              <a:t>perf report</a:t>
+            </a:r>
+          </a:p>
+          <a:p>
+            <a:pPr>
+              <a:spcAft>
+                <a:spcPts val="0"/>
+              </a:spcAft>
+            </a:pPr>
+            <a:r>
+              <a:rPr sz="1100">
+                <a:solidFill>
+                  <a:srgbClr val="2D2D2D"/>
+                </a:solidFill>
+                <a:latin typeface="Consolas"/>
+              </a:rPr>
               <a:t> </a:t>
             </a:r>
           </a:p>
@@ -6872,7 +7293,7 @@
                 </a:solidFill>
                 <a:latin typeface="Consolas"/>
               </a:rPr>
-              <a:t># Filesystem-level — what's slow</a:t>
+              <a:t># What syscalls are slow</a:t>
             </a:r>
           </a:p>
           <a:p>
@@ -6888,23 +7309,7 @@
                 </a:solidFill>
                 <a:latin typeface="Consolas"/>
               </a:rPr>
-              <a:t>filetop                       # (if bpftrace/perf-tools installed)</a:t>
-            </a:r>
-          </a:p>
-          <a:p>
-            <a:pPr>
-              <a:spcAft>
-                <a:spcPts val="0"/>
-              </a:spcAft>
-            </a:pPr>
-            <a:r>
-              <a:rPr sz="1100">
-                <a:solidFill>
-                  <a:srgbClr val="2D2D2D"/>
-                </a:solidFill>
-                <a:latin typeface="Consolas"/>
-              </a:rPr>
-              <a:t> </a:t>
+              <a:t>strace -c -p &lt;pid&gt;</a:t>
             </a:r>
           </a:p>
           <a:p>
@@ -6920,55 +7325,7 @@
                 </a:solidFill>
                 <a:latin typeface="Consolas"/>
               </a:rPr>
-              <a:t># Common I/O issues on embedded:</a:t>
-            </a:r>
-          </a:p>
-          <a:p>
-            <a:pPr>
-              <a:spcAft>
-                <a:spcPts val="0"/>
-              </a:spcAft>
-            </a:pPr>
-            <a:r>
-              <a:rPr sz="1100" i="1">
-                <a:solidFill>
-                  <a:srgbClr val="808080"/>
-                </a:solidFill>
-                <a:latin typeface="Consolas"/>
-              </a:rPr>
-              <a:t># - Frequent fsync calls (sqlite default) — batch them or use WAL mode</a:t>
-            </a:r>
-          </a:p>
-          <a:p>
-            <a:pPr>
-              <a:spcAft>
-                <a:spcPts val="0"/>
-              </a:spcAft>
-            </a:pPr>
-            <a:r>
-              <a:rPr sz="1100" i="1">
-                <a:solidFill>
-                  <a:srgbClr val="808080"/>
-                </a:solidFill>
-                <a:latin typeface="Consolas"/>
-              </a:rPr>
-              <a:t># - Lots of small writes to same dir — block-level pressure</a:t>
-            </a:r>
-          </a:p>
-          <a:p>
-            <a:pPr>
-              <a:spcAft>
-                <a:spcPts val="0"/>
-              </a:spcAft>
-            </a:pPr>
-            <a:r>
-              <a:rPr sz="1100" i="1">
-                <a:solidFill>
-                  <a:srgbClr val="808080"/>
-                </a:solidFill>
-                <a:latin typeface="Consolas"/>
-              </a:rPr>
-              <a:t># - readahead too aggressive on flash — tune in /sys/block/.../queue/read_ahead_kb</a:t>
+              <a:t># Press Ctrl-C; see syscall summary</a:t>
             </a:r>
           </a:p>
         </p:txBody>
@@ -6981,8 +7338,8 @@
 </p:sld>
 </file>
 
-<file path=ppt/slides/slide14.xml><?xml version="1.0" encoding="utf-8"?>
-<p:sld xmlns:a="http://schemas.openxmlformats.org/drawingml/2006/main" xmlns:p="http://schemas.openxmlformats.org/presentationml/2006/main" xmlns:r="http://schemas.openxmlformats.org/officeDocument/2006/relationships">
+<file path=ppt/slides/slide7.xml><?xml version="1.0" encoding="utf-8"?>
+<p:sld xmlns:a="http://schemas.openxmlformats.org/drawingml/2006/main" xmlns:r="http://schemas.openxmlformats.org/officeDocument/2006/relationships" xmlns:p="http://schemas.openxmlformats.org/presentationml/2006/main">
   <p:cSld>
     <p:spTree>
       <p:nvGrpSpPr>
@@ -6990,7 +7347,14 @@
         <p:cNvGrpSpPr/>
         <p:nvPr/>
       </p:nvGrpSpPr>
-      <p:grpSpPr/>
+      <p:grpSpPr>
+        <a:xfrm>
+          <a:off x="0" y="0"/>
+          <a:ext cx="0" cy="0"/>
+          <a:chOff x="0" y="0"/>
+          <a:chExt cx="0" cy="0"/>
+        </a:xfrm>
+      </p:grpSpPr>
       <p:sp>
         <p:nvSpPr>
           <p:cNvPr id="2" name="Title 1"/>
@@ -7013,7 +7377,7 @@
                 </a:solidFill>
                 <a:latin typeface="Calibri"/>
               </a:rPr>
-              <a:t>Hands-On Measurement</a:t>
+              <a:t>I/O Bottlenecks</a:t>
             </a:r>
           </a:p>
         </p:txBody>
@@ -7035,7 +7399,7 @@
           <a:noFill/>
         </p:spPr>
         <p:txBody>
-          <a:bodyPr wrap="square" anchor="t" lIns="45720" rIns="45720">
+          <a:bodyPr wrap="square" lIns="45720" rIns="45720" anchor="t">
             <a:spAutoFit/>
           </a:bodyPr>
           <a:lstStyle/>
@@ -7048,7 +7412,7 @@
                 </a:solidFill>
                 <a:latin typeface="Calibri"/>
               </a:rPr>
-              <a:t>Apply the tools to TrainerGW. Find one thing to fix.</a:t>
+              <a:t>Disk I/O is often the hidden killer on embedded.</a:t>
             </a:r>
           </a:p>
         </p:txBody>
@@ -7096,6 +7460,7 @@
           <a:lstStyle/>
           <a:p>
             <a:pPr algn="ctr"/>
+            <a:endParaRPr/>
           </a:p>
         </p:txBody>
       </p:sp>
@@ -7140,6 +7505,7 @@
           <a:lstStyle/>
           <a:p>
             <a:pPr algn="ctr"/>
+            <a:endParaRPr/>
           </a:p>
         </p:txBody>
       </p:sp>
@@ -7171,28 +7537,76 @@
               </a:spcAft>
             </a:pPr>
             <a:r>
-              <a:rPr sz="1000" i="1">
+              <a:rPr sz="1100" i="1">
                 <a:solidFill>
                   <a:srgbClr val="808080"/>
                 </a:solidFill>
                 <a:latin typeface="Consolas"/>
               </a:rPr>
-              <a:t># Boot TrainerGW and run the lab</a:t>
-            </a:r>
-          </a:p>
-          <a:p>
-            <a:pPr>
-              <a:spcAft>
-                <a:spcPts val="0"/>
-              </a:spcAft>
-            </a:pPr>
-            <a:r>
-              <a:rPr sz="1000">
+              <a:t># Per-process I/O activity (sysstat or iotop)</a:t>
+            </a:r>
+          </a:p>
+          <a:p>
+            <a:pPr>
+              <a:spcAft>
+                <a:spcPts val="0"/>
+              </a:spcAft>
+            </a:pPr>
+            <a:r>
+              <a:rPr sz="1100">
                 <a:solidFill>
                   <a:srgbClr val="2D2D2D"/>
                 </a:solidFill>
                 <a:latin typeface="Consolas"/>
               </a:rPr>
+              <a:t>iotop</a:t>
+            </a:r>
+          </a:p>
+          <a:p>
+            <a:pPr>
+              <a:spcAft>
+                <a:spcPts val="0"/>
+              </a:spcAft>
+            </a:pPr>
+            <a:r>
+              <a:rPr sz="1100" i="1">
+                <a:solidFill>
+                  <a:srgbClr val="808080"/>
+                </a:solidFill>
+                <a:latin typeface="Consolas"/>
+              </a:rPr>
+              <a:t># Press 'o' to show only processes currently doing I/O</a:t>
+            </a:r>
+          </a:p>
+          <a:p>
+            <a:pPr>
+              <a:spcAft>
+                <a:spcPts val="0"/>
+              </a:spcAft>
+            </a:pPr>
+            <a:r>
+              <a:rPr sz="1100">
+                <a:solidFill>
+                  <a:srgbClr val="2D2D2D"/>
+                </a:solidFill>
+                <a:latin typeface="Consolas"/>
+              </a:rPr>
+              <a:t>iotop -a -d 5</a:t>
+            </a:r>
+          </a:p>
+          <a:p>
+            <a:pPr>
+              <a:spcAft>
+                <a:spcPts val="0"/>
+              </a:spcAft>
+            </a:pPr>
+            <a:r>
+              <a:rPr sz="1100">
+                <a:solidFill>
+                  <a:srgbClr val="2D2D2D"/>
+                </a:solidFill>
+                <a:latin typeface="Consolas"/>
+              </a:rPr>
               <a:t> </a:t>
             </a:r>
           </a:p>
@@ -7203,71 +7617,119 @@
               </a:spcAft>
             </a:pPr>
             <a:r>
-              <a:rPr sz="1000" i="1">
+              <a:rPr sz="1100" i="1">
                 <a:solidFill>
                   <a:srgbClr val="808080"/>
                 </a:solidFill>
                 <a:latin typeface="Consolas"/>
               </a:rPr>
-              <a:t># 1. Measure boot</a:t>
-            </a:r>
-          </a:p>
-          <a:p>
-            <a:pPr>
-              <a:spcAft>
-                <a:spcPts val="0"/>
-              </a:spcAft>
-            </a:pPr>
-            <a:r>
-              <a:rPr sz="1000">
+              <a:t># Device-level</a:t>
+            </a:r>
+          </a:p>
+          <a:p>
+            <a:pPr>
+              <a:spcAft>
+                <a:spcPts val="0"/>
+              </a:spcAft>
+            </a:pPr>
+            <a:r>
+              <a:rPr sz="1100">
                 <a:solidFill>
                   <a:srgbClr val="2D2D2D"/>
                 </a:solidFill>
                 <a:latin typeface="Consolas"/>
               </a:rPr>
-              <a:t>systemd-analyze</a:t>
-            </a:r>
-          </a:p>
-          <a:p>
-            <a:pPr>
-              <a:spcAft>
-                <a:spcPts val="0"/>
-              </a:spcAft>
-            </a:pPr>
-            <a:r>
-              <a:rPr sz="1000">
+              <a:t>iostat -x 2</a:t>
+            </a:r>
+          </a:p>
+          <a:p>
+            <a:pPr>
+              <a:spcAft>
+                <a:spcPts val="0"/>
+              </a:spcAft>
+            </a:pPr>
+            <a:r>
+              <a:rPr sz="1100" i="1">
+                <a:solidFill>
+                  <a:srgbClr val="808080"/>
+                </a:solidFill>
+                <a:latin typeface="Consolas"/>
+              </a:rPr>
+              <a:t>#                rkB/s    wkB/s     await  %util</a:t>
+            </a:r>
+          </a:p>
+          <a:p>
+            <a:pPr>
+              <a:spcAft>
+                <a:spcPts val="0"/>
+              </a:spcAft>
+            </a:pPr>
+            <a:r>
+              <a:rPr sz="1100" i="1">
+                <a:solidFill>
+                  <a:srgbClr val="808080"/>
+                </a:solidFill>
+                <a:latin typeface="Consolas"/>
+              </a:rPr>
+              <a:t># mmcblk0p2       0.50    25.4      8.20   45.2%</a:t>
+            </a:r>
+          </a:p>
+          <a:p>
+            <a:pPr>
+              <a:spcAft>
+                <a:spcPts val="0"/>
+              </a:spcAft>
+            </a:pPr>
+            <a:r>
+              <a:rPr sz="1100">
                 <a:solidFill>
                   <a:srgbClr val="2D2D2D"/>
                 </a:solidFill>
                 <a:latin typeface="Consolas"/>
               </a:rPr>
-              <a:t>systemd-analyze blame | head -10</a:t>
-            </a:r>
-          </a:p>
-          <a:p>
-            <a:pPr>
-              <a:spcAft>
-                <a:spcPts val="0"/>
-              </a:spcAft>
-            </a:pPr>
-            <a:r>
-              <a:rPr sz="1000">
+              <a:t> </a:t>
+            </a:r>
+          </a:p>
+          <a:p>
+            <a:pPr>
+              <a:spcAft>
+                <a:spcPts val="0"/>
+              </a:spcAft>
+            </a:pPr>
+            <a:r>
+              <a:rPr sz="1100" i="1">
+                <a:solidFill>
+                  <a:srgbClr val="808080"/>
+                </a:solidFill>
+                <a:latin typeface="Consolas"/>
+              </a:rPr>
+              <a:t># Open files per process</a:t>
+            </a:r>
+          </a:p>
+          <a:p>
+            <a:pPr>
+              <a:spcAft>
+                <a:spcPts val="0"/>
+              </a:spcAft>
+            </a:pPr>
+            <a:r>
+              <a:rPr sz="1100">
                 <a:solidFill>
                   <a:srgbClr val="2D2D2D"/>
                 </a:solidFill>
                 <a:latin typeface="Consolas"/>
               </a:rPr>
-              <a:t>systemd-analyze critical-chain</a:t>
-            </a:r>
-          </a:p>
-          <a:p>
-            <a:pPr>
-              <a:spcAft>
-                <a:spcPts val="0"/>
-              </a:spcAft>
-            </a:pPr>
-            <a:r>
-              <a:rPr sz="1000">
+              <a:t>lsof -p &lt;pid&gt; | head</a:t>
+            </a:r>
+          </a:p>
+          <a:p>
+            <a:pPr>
+              <a:spcAft>
+                <a:spcPts val="0"/>
+              </a:spcAft>
+            </a:pPr>
+            <a:r>
+              <a:rPr sz="1100">
                 <a:solidFill>
                   <a:srgbClr val="2D2D2D"/>
                 </a:solidFill>
@@ -7283,60 +7745,44 @@
               </a:spcAft>
             </a:pPr>
             <a:r>
-              <a:rPr sz="1000" i="1">
+              <a:rPr sz="1100" i="1">
                 <a:solidFill>
                   <a:srgbClr val="808080"/>
                 </a:solidFill>
                 <a:latin typeface="Consolas"/>
               </a:rPr>
-              <a:t># 2. Identify the slowest service. Investigate why.</a:t>
-            </a:r>
-          </a:p>
-          <a:p>
-            <a:pPr>
-              <a:spcAft>
-                <a:spcPts val="0"/>
-              </a:spcAft>
-            </a:pPr>
-            <a:r>
-              <a:rPr sz="1000">
+              <a:t># Filesystem-level — what's slow</a:t>
+            </a:r>
+          </a:p>
+          <a:p>
+            <a:pPr>
+              <a:spcAft>
+                <a:spcPts val="0"/>
+              </a:spcAft>
+            </a:pPr>
+            <a:r>
+              <a:rPr sz="1100">
                 <a:solidFill>
                   <a:srgbClr val="2D2D2D"/>
                 </a:solidFill>
                 <a:latin typeface="Consolas"/>
               </a:rPr>
-              <a:t>systemctl status &lt;slow-service&gt;</a:t>
-            </a:r>
-          </a:p>
-          <a:p>
-            <a:pPr>
-              <a:spcAft>
-                <a:spcPts val="0"/>
-              </a:spcAft>
-            </a:pPr>
-            <a:r>
-              <a:rPr sz="1000">
+              <a:t>filetop                       # (if bpftrace/perf-tools installed)</a:t>
+            </a:r>
+          </a:p>
+          <a:p>
+            <a:pPr>
+              <a:spcAft>
+                <a:spcPts val="0"/>
+              </a:spcAft>
+            </a:pPr>
+            <a:r>
+              <a:rPr sz="1100">
                 <a:solidFill>
                   <a:srgbClr val="2D2D2D"/>
                 </a:solidFill>
                 <a:latin typeface="Consolas"/>
               </a:rPr>
-              <a:t>journalctl -u &lt;slow-service&gt;</a:t>
-            </a:r>
-          </a:p>
-          <a:p>
-            <a:pPr>
-              <a:spcAft>
-                <a:spcPts val="0"/>
-              </a:spcAft>
-            </a:pPr>
-            <a:r>
-              <a:rPr sz="1000">
-                <a:solidFill>
-                  <a:srgbClr val="2D2D2D"/>
-                </a:solidFill>
-                <a:latin typeface="Consolas"/>
-              </a:rPr>
               <a:t> </a:t>
             </a:r>
           </a:p>
@@ -7347,237 +7793,61 @@
               </a:spcAft>
             </a:pPr>
             <a:r>
-              <a:rPr sz="1000" i="1">
+              <a:rPr sz="1100" i="1">
                 <a:solidFill>
                   <a:srgbClr val="808080"/>
                 </a:solidFill>
                 <a:latin typeface="Consolas"/>
               </a:rPr>
-              <a:t># 3. Memory snapshot</a:t>
-            </a:r>
-          </a:p>
-          <a:p>
-            <a:pPr>
-              <a:spcAft>
-                <a:spcPts val="0"/>
-              </a:spcAft>
-            </a:pPr>
-            <a:r>
-              <a:rPr sz="1000">
-                <a:solidFill>
-                  <a:srgbClr val="2D2D2D"/>
-                </a:solidFill>
-                <a:latin typeface="Consolas"/>
-              </a:rPr>
-              <a:t>free -h</a:t>
-            </a:r>
-          </a:p>
-          <a:p>
-            <a:pPr>
-              <a:spcAft>
-                <a:spcPts val="0"/>
-              </a:spcAft>
-            </a:pPr>
-            <a:r>
-              <a:rPr sz="1000">
-                <a:solidFill>
-                  <a:srgbClr val="2D2D2D"/>
-                </a:solidFill>
-                <a:latin typeface="Consolas"/>
-              </a:rPr>
-              <a:t>ps aux --sort=-rss | head</a:t>
-            </a:r>
-          </a:p>
-          <a:p>
-            <a:pPr>
-              <a:spcAft>
-                <a:spcPts val="0"/>
-              </a:spcAft>
-            </a:pPr>
-            <a:r>
-              <a:rPr sz="1000">
-                <a:solidFill>
-                  <a:srgbClr val="2D2D2D"/>
-                </a:solidFill>
-                <a:latin typeface="Consolas"/>
-              </a:rPr>
-              <a:t> </a:t>
-            </a:r>
-          </a:p>
-          <a:p>
-            <a:pPr>
-              <a:spcAft>
-                <a:spcPts val="0"/>
-              </a:spcAft>
-            </a:pPr>
-            <a:r>
-              <a:rPr sz="1000" i="1">
+              <a:t># Common I/O issues on embedded:</a:t>
+            </a:r>
+          </a:p>
+          <a:p>
+            <a:pPr>
+              <a:spcAft>
+                <a:spcPts val="0"/>
+              </a:spcAft>
+            </a:pPr>
+            <a:r>
+              <a:rPr sz="1100" i="1">
                 <a:solidFill>
                   <a:srgbClr val="808080"/>
                 </a:solidFill>
                 <a:latin typeface="Consolas"/>
               </a:rPr>
-              <a:t># 4. CPU under load — generate some</a:t>
-            </a:r>
-          </a:p>
-          <a:p>
-            <a:pPr>
-              <a:spcAft>
-                <a:spcPts val="0"/>
-              </a:spcAft>
-            </a:pPr>
-            <a:r>
-              <a:rPr sz="1000">
-                <a:solidFill>
-                  <a:srgbClr val="2D2D2D"/>
-                </a:solidFill>
-                <a:latin typeface="Consolas"/>
-              </a:rPr>
-              <a:t>yes &gt; /dev/null &amp;</a:t>
-            </a:r>
-          </a:p>
-          <a:p>
-            <a:pPr>
-              <a:spcAft>
-                <a:spcPts val="0"/>
-              </a:spcAft>
-            </a:pPr>
-            <a:r>
-              <a:rPr sz="1000">
-                <a:solidFill>
-                  <a:srgbClr val="2D2D2D"/>
-                </a:solidFill>
-                <a:latin typeface="Consolas"/>
-              </a:rPr>
-              <a:t>yes &gt; /dev/null &amp;</a:t>
-            </a:r>
-          </a:p>
-          <a:p>
-            <a:pPr>
-              <a:spcAft>
-                <a:spcPts val="0"/>
-              </a:spcAft>
-            </a:pPr>
-            <a:r>
-              <a:rPr sz="1000">
-                <a:solidFill>
-                  <a:srgbClr val="2D2D2D"/>
-                </a:solidFill>
-                <a:latin typeface="Consolas"/>
-              </a:rPr>
-              <a:t>top  # observe; pkill yes when done</a:t>
-            </a:r>
-          </a:p>
-          <a:p>
-            <a:pPr>
-              <a:spcAft>
-                <a:spcPts val="0"/>
-              </a:spcAft>
-            </a:pPr>
-            <a:r>
-              <a:rPr sz="1000">
-                <a:solidFill>
-                  <a:srgbClr val="2D2D2D"/>
-                </a:solidFill>
-                <a:latin typeface="Consolas"/>
-              </a:rPr>
-              <a:t> </a:t>
-            </a:r>
-          </a:p>
-          <a:p>
-            <a:pPr>
-              <a:spcAft>
-                <a:spcPts val="0"/>
-              </a:spcAft>
-            </a:pPr>
-            <a:r>
-              <a:rPr sz="1000" i="1">
+              <a:t># - Frequent fsync calls (sqlite default) — batch them or use WAL mode</a:t>
+            </a:r>
+          </a:p>
+          <a:p>
+            <a:pPr>
+              <a:spcAft>
+                <a:spcPts val="0"/>
+              </a:spcAft>
+            </a:pPr>
+            <a:r>
+              <a:rPr sz="1100" i="1">
                 <a:solidFill>
                   <a:srgbClr val="808080"/>
                 </a:solidFill>
                 <a:latin typeface="Consolas"/>
               </a:rPr>
-              <a:t># 5. I/O test</a:t>
-            </a:r>
-          </a:p>
-          <a:p>
-            <a:pPr>
-              <a:spcAft>
-                <a:spcPts val="0"/>
-              </a:spcAft>
-            </a:pPr>
-            <a:r>
-              <a:rPr sz="1000">
-                <a:solidFill>
-                  <a:srgbClr val="2D2D2D"/>
-                </a:solidFill>
-                <a:latin typeface="Consolas"/>
-              </a:rPr>
-              <a:t>dd if=/dev/zero of=/tmp/iotest bs=1M count=100 conv=fdatasync</a:t>
-            </a:r>
-          </a:p>
-          <a:p>
-            <a:pPr>
-              <a:spcAft>
-                <a:spcPts val="0"/>
-              </a:spcAft>
-            </a:pPr>
-            <a:r>
-              <a:rPr sz="1000">
-                <a:solidFill>
-                  <a:srgbClr val="2D2D2D"/>
-                </a:solidFill>
-                <a:latin typeface="Consolas"/>
-              </a:rPr>
-              <a:t>iostat -x 2 5 &amp;</a:t>
-            </a:r>
-          </a:p>
-          <a:p>
-            <a:pPr>
-              <a:spcAft>
-                <a:spcPts val="0"/>
-              </a:spcAft>
-            </a:pPr>
-            <a:r>
-              <a:rPr sz="1000">
-                <a:solidFill>
-                  <a:srgbClr val="2D2D2D"/>
-                </a:solidFill>
-                <a:latin typeface="Consolas"/>
-              </a:rPr>
-              <a:t>dd if=/dev/zero of=/tmp/iotest bs=1M count=100 conv=fdatasync</a:t>
-            </a:r>
-          </a:p>
-          <a:p>
-            <a:pPr>
-              <a:spcAft>
-                <a:spcPts val="0"/>
-              </a:spcAft>
-            </a:pPr>
-            <a:r>
-              <a:rPr sz="1000">
-                <a:solidFill>
-                  <a:srgbClr val="2D2D2D"/>
-                </a:solidFill>
-                <a:latin typeface="Consolas"/>
-              </a:rPr>
-              <a:t> </a:t>
-            </a:r>
-          </a:p>
-          <a:p>
-            <a:pPr>
-              <a:spcAft>
-                <a:spcPts val="0"/>
-              </a:spcAft>
-            </a:pPr>
-            <a:r>
-              <a:rPr sz="1000" i="1">
+              <a:t># - Lots of small writes to same dir — block-level pressure</a:t>
+            </a:r>
+          </a:p>
+          <a:p>
+            <a:pPr>
+              <a:spcAft>
+                <a:spcPts val="0"/>
+              </a:spcAft>
+            </a:pPr>
+            <a:r>
+              <a:rPr sz="1100" i="1">
                 <a:solidFill>
                   <a:srgbClr val="808080"/>
                 </a:solidFill>
                 <a:latin typeface="Consolas"/>
               </a:rPr>
-              <a:t># 6. Optional: apply one optimization and re-measure</a:t>
+              <a:t># - readahead too aggressive on flash — tune in /sys/block/.../queue/read_ahead_kb</a:t>
             </a:r>
           </a:p>
         </p:txBody>
@@ -7590,8 +7860,8 @@
 </p:sld>
 </file>
 
-<file path=ppt/slides/slide15.xml><?xml version="1.0" encoding="utf-8"?>
-<p:sld xmlns:a="http://schemas.openxmlformats.org/drawingml/2006/main" xmlns:p="http://schemas.openxmlformats.org/presentationml/2006/main" xmlns:r="http://schemas.openxmlformats.org/officeDocument/2006/relationships">
+<file path=ppt/slides/slide8.xml><?xml version="1.0" encoding="utf-8"?>
+<p:sld xmlns:a="http://schemas.openxmlformats.org/drawingml/2006/main" xmlns:r="http://schemas.openxmlformats.org/officeDocument/2006/relationships" xmlns:p="http://schemas.openxmlformats.org/presentationml/2006/main">
   <p:cSld>
     <p:spTree>
       <p:nvGrpSpPr>
@@ -7599,7 +7869,14 @@
         <p:cNvGrpSpPr/>
         <p:nvPr/>
       </p:nvGrpSpPr>
-      <p:grpSpPr/>
+      <p:grpSpPr>
+        <a:xfrm>
+          <a:off x="0" y="0"/>
+          <a:ext cx="0" cy="0"/>
+          <a:chOff x="0" y="0"/>
+          <a:chExt cx="0" cy="0"/>
+        </a:xfrm>
+      </p:grpSpPr>
       <p:sp>
         <p:nvSpPr>
           <p:cNvPr id="2" name="Title 1"/>
@@ -7618,11 +7895,11 @@
             <a:r>
               <a:rPr sz="3200" b="1">
                 <a:solidFill>
-                  <a:srgbClr val="663399"/>
+                  <a:srgbClr val="CC0066"/>
                 </a:solidFill>
                 <a:latin typeface="Calibri"/>
               </a:rPr>
-              <a:t>Session Summary</a:t>
+              <a:t>Hands-On Measurement</a:t>
             </a:r>
           </a:p>
         </p:txBody>
@@ -7644,7 +7921,7 @@
           <a:noFill/>
         </p:spPr>
         <p:txBody>
-          <a:bodyPr wrap="square" anchor="t" lIns="45720" rIns="45720">
+          <a:bodyPr wrap="square" lIns="45720" rIns="45720" anchor="t">
             <a:spAutoFit/>
           </a:bodyPr>
           <a:lstStyle/>
@@ -7657,1011 +7934,7 @@
                 </a:solidFill>
                 <a:latin typeface="Calibri"/>
               </a:rPr>
-              <a:t>5 things to remember from this session.</a:t>
-            </a:r>
-          </a:p>
-        </p:txBody>
-      </p:sp>
-      <p:sp>
-        <p:nvSpPr>
-          <p:cNvPr id="4" name="Rounded Rectangle 3"/>
-          <p:cNvSpPr/>
-          <p:nvPr/>
-        </p:nvSpPr>
-        <p:spPr>
-          <a:xfrm>
-            <a:off x="822960" y="1874519"/>
-            <a:ext cx="457200" cy="548640"/>
-          </a:xfrm>
-          <a:prstGeom prst="roundRect">
-            <a:avLst/>
-          </a:prstGeom>
-          <a:solidFill>
-            <a:srgbClr val="CC0066"/>
-          </a:solidFill>
-          <a:ln>
-            <a:noFill/>
-          </a:ln>
-          <a:effectLst/>
-        </p:spPr>
-        <p:style>
-          <a:lnRef idx="1">
-            <a:schemeClr val="accent1"/>
-          </a:lnRef>
-          <a:fillRef idx="3">
-            <a:schemeClr val="accent1"/>
-          </a:fillRef>
-          <a:effectRef idx="2">
-            <a:schemeClr val="accent1"/>
-          </a:effectRef>
-          <a:fontRef idx="minor">
-            <a:schemeClr val="lt1"/>
-          </a:fontRef>
-        </p:style>
-        <p:txBody>
-          <a:bodyPr rtlCol="0" anchor="ctr" lIns="0" rIns="0"/>
-          <a:lstStyle/>
-          <a:p>
-            <a:pPr algn="ctr"/>
-            <a:r>
-              <a:rPr sz="2200" b="1">
-                <a:solidFill>
-                  <a:srgbClr val="FFFFFF"/>
-                </a:solidFill>
-                <a:latin typeface="Calibri"/>
-              </a:rPr>
-              <a:t>1</a:t>
-            </a:r>
-          </a:p>
-        </p:txBody>
-      </p:sp>
-      <p:sp>
-        <p:nvSpPr>
-          <p:cNvPr id="5" name="TextBox 4"/>
-          <p:cNvSpPr txBox="1"/>
-          <p:nvPr/>
-        </p:nvSpPr>
-        <p:spPr>
-          <a:xfrm>
-            <a:off x="1417320" y="1874519"/>
-            <a:ext cx="10058400" cy="320040"/>
-          </a:xfrm>
-          <a:prstGeom prst="rect">
-            <a:avLst/>
-          </a:prstGeom>
-          <a:noFill/>
-        </p:spPr>
-        <p:txBody>
-          <a:bodyPr wrap="square" anchor="t" lIns="45720" rIns="45720">
-            <a:spAutoFit/>
-          </a:bodyPr>
-          <a:lstStyle/>
-          <a:p>
-            <a:pPr algn="l"/>
-            <a:r>
-              <a:rPr sz="1600" b="1" i="0">
-                <a:solidFill>
-                  <a:srgbClr val="663399"/>
-                </a:solidFill>
-                <a:latin typeface="Calibri"/>
-              </a:rPr>
-              <a:t>systemd-analyze is the start of boot-time work</a:t>
-            </a:r>
-          </a:p>
-        </p:txBody>
-      </p:sp>
-      <p:sp>
-        <p:nvSpPr>
-          <p:cNvPr id="6" name="TextBox 5"/>
-          <p:cNvSpPr txBox="1"/>
-          <p:nvPr/>
-        </p:nvSpPr>
-        <p:spPr>
-          <a:xfrm>
-            <a:off x="1417320" y="2185415"/>
-            <a:ext cx="10058400" cy="320040"/>
-          </a:xfrm>
-          <a:prstGeom prst="rect">
-            <a:avLst/>
-          </a:prstGeom>
-          <a:noFill/>
-        </p:spPr>
-        <p:txBody>
-          <a:bodyPr wrap="square" anchor="t" lIns="45720" rIns="45720">
-            <a:spAutoFit/>
-          </a:bodyPr>
-          <a:lstStyle/>
-          <a:p>
-            <a:pPr algn="l"/>
-            <a:r>
-              <a:rPr sz="1300" b="0" i="0">
-                <a:solidFill>
-                  <a:srgbClr val="333333"/>
-                </a:solidFill>
-                <a:latin typeface="Calibri"/>
-              </a:rPr>
-              <a:t>Overall, blame, critical-chain, plot — four commands cover most of it</a:t>
-            </a:r>
-          </a:p>
-        </p:txBody>
-      </p:sp>
-      <p:sp>
-        <p:nvSpPr>
-          <p:cNvPr id="7" name="Rounded Rectangle 6"/>
-          <p:cNvSpPr/>
-          <p:nvPr/>
-        </p:nvSpPr>
-        <p:spPr>
-          <a:xfrm>
-            <a:off x="822960" y="2587752"/>
-            <a:ext cx="457200" cy="548640"/>
-          </a:xfrm>
-          <a:prstGeom prst="roundRect">
-            <a:avLst/>
-          </a:prstGeom>
-          <a:solidFill>
-            <a:srgbClr val="CC0066"/>
-          </a:solidFill>
-          <a:ln>
-            <a:noFill/>
-          </a:ln>
-          <a:effectLst/>
-        </p:spPr>
-        <p:style>
-          <a:lnRef idx="1">
-            <a:schemeClr val="accent1"/>
-          </a:lnRef>
-          <a:fillRef idx="3">
-            <a:schemeClr val="accent1"/>
-          </a:fillRef>
-          <a:effectRef idx="2">
-            <a:schemeClr val="accent1"/>
-          </a:effectRef>
-          <a:fontRef idx="minor">
-            <a:schemeClr val="lt1"/>
-          </a:fontRef>
-        </p:style>
-        <p:txBody>
-          <a:bodyPr rtlCol="0" anchor="ctr" lIns="0" rIns="0"/>
-          <a:lstStyle/>
-          <a:p>
-            <a:pPr algn="ctr"/>
-            <a:r>
-              <a:rPr sz="2200" b="1">
-                <a:solidFill>
-                  <a:srgbClr val="FFFFFF"/>
-                </a:solidFill>
-                <a:latin typeface="Calibri"/>
-              </a:rPr>
-              <a:t>2</a:t>
-            </a:r>
-          </a:p>
-        </p:txBody>
-      </p:sp>
-      <p:sp>
-        <p:nvSpPr>
-          <p:cNvPr id="8" name="TextBox 7"/>
-          <p:cNvSpPr txBox="1"/>
-          <p:nvPr/>
-        </p:nvSpPr>
-        <p:spPr>
-          <a:xfrm>
-            <a:off x="1417320" y="2587752"/>
-            <a:ext cx="10058400" cy="320040"/>
-          </a:xfrm>
-          <a:prstGeom prst="rect">
-            <a:avLst/>
-          </a:prstGeom>
-          <a:noFill/>
-        </p:spPr>
-        <p:txBody>
-          <a:bodyPr wrap="square" anchor="t" lIns="45720" rIns="45720">
-            <a:spAutoFit/>
-          </a:bodyPr>
-          <a:lstStyle/>
-          <a:p>
-            <a:pPr algn="l"/>
-            <a:r>
-              <a:rPr sz="1600" b="1" i="0">
-                <a:solidFill>
-                  <a:srgbClr val="663399"/>
-                </a:solidFill>
-                <a:latin typeface="Calibri"/>
-              </a:rPr>
-              <a:t>Five common boot-time levers give cumulative savings</a:t>
-            </a:r>
-          </a:p>
-        </p:txBody>
-      </p:sp>
-      <p:sp>
-        <p:nvSpPr>
-          <p:cNvPr id="9" name="TextBox 8"/>
-          <p:cNvSpPr txBox="1"/>
-          <p:nvPr/>
-        </p:nvSpPr>
-        <p:spPr>
-          <a:xfrm>
-            <a:off x="1417320" y="2898648"/>
-            <a:ext cx="10058400" cy="320040"/>
-          </a:xfrm>
-          <a:prstGeom prst="rect">
-            <a:avLst/>
-          </a:prstGeom>
-          <a:noFill/>
-        </p:spPr>
-        <p:txBody>
-          <a:bodyPr wrap="square" anchor="t" lIns="45720" rIns="45720">
-            <a:spAutoFit/>
-          </a:bodyPr>
-          <a:lstStyle/>
-          <a:p>
-            <a:pPr algn="l"/>
-            <a:r>
-              <a:rPr sz="1300" b="0" i="0">
-                <a:solidFill>
-                  <a:srgbClr val="333333"/>
-                </a:solidFill>
-                <a:latin typeface="Calibri"/>
-              </a:rPr>
-              <a:t>Disable services, strip kernel debug, drop initramfs, quiet boot, dash</a:t>
-            </a:r>
-          </a:p>
-        </p:txBody>
-      </p:sp>
-      <p:sp>
-        <p:nvSpPr>
-          <p:cNvPr id="10" name="Rounded Rectangle 9"/>
-          <p:cNvSpPr/>
-          <p:nvPr/>
-        </p:nvSpPr>
-        <p:spPr>
-          <a:xfrm>
-            <a:off x="822960" y="3300984"/>
-            <a:ext cx="457200" cy="548640"/>
-          </a:xfrm>
-          <a:prstGeom prst="roundRect">
-            <a:avLst/>
-          </a:prstGeom>
-          <a:solidFill>
-            <a:srgbClr val="CC0066"/>
-          </a:solidFill>
-          <a:ln>
-            <a:noFill/>
-          </a:ln>
-          <a:effectLst/>
-        </p:spPr>
-        <p:style>
-          <a:lnRef idx="1">
-            <a:schemeClr val="accent1"/>
-          </a:lnRef>
-          <a:fillRef idx="3">
-            <a:schemeClr val="accent1"/>
-          </a:fillRef>
-          <a:effectRef idx="2">
-            <a:schemeClr val="accent1"/>
-          </a:effectRef>
-          <a:fontRef idx="minor">
-            <a:schemeClr val="lt1"/>
-          </a:fontRef>
-        </p:style>
-        <p:txBody>
-          <a:bodyPr rtlCol="0" anchor="ctr" lIns="0" rIns="0"/>
-          <a:lstStyle/>
-          <a:p>
-            <a:pPr algn="ctr"/>
-            <a:r>
-              <a:rPr sz="2200" b="1">
-                <a:solidFill>
-                  <a:srgbClr val="FFFFFF"/>
-                </a:solidFill>
-                <a:latin typeface="Calibri"/>
-              </a:rPr>
-              <a:t>3</a:t>
-            </a:r>
-          </a:p>
-        </p:txBody>
-      </p:sp>
-      <p:sp>
-        <p:nvSpPr>
-          <p:cNvPr id="11" name="TextBox 10"/>
-          <p:cNvSpPr txBox="1"/>
-          <p:nvPr/>
-        </p:nvSpPr>
-        <p:spPr>
-          <a:xfrm>
-            <a:off x="1417320" y="3300984"/>
-            <a:ext cx="10058400" cy="320040"/>
-          </a:xfrm>
-          <a:prstGeom prst="rect">
-            <a:avLst/>
-          </a:prstGeom>
-          <a:noFill/>
-        </p:spPr>
-        <p:txBody>
-          <a:bodyPr wrap="square" anchor="t" lIns="45720" rIns="45720">
-            <a:spAutoFit/>
-          </a:bodyPr>
-          <a:lstStyle/>
-          <a:p>
-            <a:pPr algn="l"/>
-            <a:r>
-              <a:rPr sz="1600" b="1" i="0">
-                <a:solidFill>
-                  <a:srgbClr val="663399"/>
-                </a:solidFill>
-                <a:latin typeface="Calibri"/>
-              </a:rPr>
-              <a:t>Memory: free + smem give different but useful views</a:t>
-            </a:r>
-          </a:p>
-        </p:txBody>
-      </p:sp>
-      <p:sp>
-        <p:nvSpPr>
-          <p:cNvPr id="12" name="TextBox 11"/>
-          <p:cNvSpPr txBox="1"/>
-          <p:nvPr/>
-        </p:nvSpPr>
-        <p:spPr>
-          <a:xfrm>
-            <a:off x="1417320" y="3611879"/>
-            <a:ext cx="10058400" cy="320040"/>
-          </a:xfrm>
-          <a:prstGeom prst="rect">
-            <a:avLst/>
-          </a:prstGeom>
-          <a:noFill/>
-        </p:spPr>
-        <p:txBody>
-          <a:bodyPr wrap="square" anchor="t" lIns="45720" rIns="45720">
-            <a:spAutoFit/>
-          </a:bodyPr>
-          <a:lstStyle/>
-          <a:p>
-            <a:pPr algn="l"/>
-            <a:r>
-              <a:rPr sz="1300" b="0" i="0">
-                <a:solidFill>
-                  <a:srgbClr val="333333"/>
-                </a:solidFill>
-                <a:latin typeface="Calibri"/>
-              </a:rPr>
-              <a:t>Use smem for accurate per-process accounting (PSS vs RSS)</a:t>
-            </a:r>
-          </a:p>
-        </p:txBody>
-      </p:sp>
-      <p:sp>
-        <p:nvSpPr>
-          <p:cNvPr id="13" name="Rounded Rectangle 12"/>
-          <p:cNvSpPr/>
-          <p:nvPr/>
-        </p:nvSpPr>
-        <p:spPr>
-          <a:xfrm>
-            <a:off x="822960" y="4014215"/>
-            <a:ext cx="457200" cy="548640"/>
-          </a:xfrm>
-          <a:prstGeom prst="roundRect">
-            <a:avLst/>
-          </a:prstGeom>
-          <a:solidFill>
-            <a:srgbClr val="CC0066"/>
-          </a:solidFill>
-          <a:ln>
-            <a:noFill/>
-          </a:ln>
-          <a:effectLst/>
-        </p:spPr>
-        <p:style>
-          <a:lnRef idx="1">
-            <a:schemeClr val="accent1"/>
-          </a:lnRef>
-          <a:fillRef idx="3">
-            <a:schemeClr val="accent1"/>
-          </a:fillRef>
-          <a:effectRef idx="2">
-            <a:schemeClr val="accent1"/>
-          </a:effectRef>
-          <a:fontRef idx="minor">
-            <a:schemeClr val="lt1"/>
-          </a:fontRef>
-        </p:style>
-        <p:txBody>
-          <a:bodyPr rtlCol="0" anchor="ctr" lIns="0" rIns="0"/>
-          <a:lstStyle/>
-          <a:p>
-            <a:pPr algn="ctr"/>
-            <a:r>
-              <a:rPr sz="2200" b="1">
-                <a:solidFill>
-                  <a:srgbClr val="FFFFFF"/>
-                </a:solidFill>
-                <a:latin typeface="Calibri"/>
-              </a:rPr>
-              <a:t>4</a:t>
-            </a:r>
-          </a:p>
-        </p:txBody>
-      </p:sp>
-      <p:sp>
-        <p:nvSpPr>
-          <p:cNvPr id="14" name="TextBox 13"/>
-          <p:cNvSpPr txBox="1"/>
-          <p:nvPr/>
-        </p:nvSpPr>
-        <p:spPr>
-          <a:xfrm>
-            <a:off x="1417320" y="4014215"/>
-            <a:ext cx="10058400" cy="320040"/>
-          </a:xfrm>
-          <a:prstGeom prst="rect">
-            <a:avLst/>
-          </a:prstGeom>
-          <a:noFill/>
-        </p:spPr>
-        <p:txBody>
-          <a:bodyPr wrap="square" anchor="t" lIns="45720" rIns="45720">
-            <a:spAutoFit/>
-          </a:bodyPr>
-          <a:lstStyle/>
-          <a:p>
-            <a:pPr algn="l"/>
-            <a:r>
-              <a:rPr sz="1600" b="1" i="0">
-                <a:solidFill>
-                  <a:srgbClr val="663399"/>
-                </a:solidFill>
-                <a:latin typeface="Calibri"/>
-              </a:rPr>
-              <a:t>CPU profiling = top + perf</a:t>
-            </a:r>
-          </a:p>
-        </p:txBody>
-      </p:sp>
-      <p:sp>
-        <p:nvSpPr>
-          <p:cNvPr id="15" name="TextBox 14"/>
-          <p:cNvSpPr txBox="1"/>
-          <p:nvPr/>
-        </p:nvSpPr>
-        <p:spPr>
-          <a:xfrm>
-            <a:off x="1417320" y="4325112"/>
-            <a:ext cx="10058400" cy="320040"/>
-          </a:xfrm>
-          <a:prstGeom prst="rect">
-            <a:avLst/>
-          </a:prstGeom>
-          <a:noFill/>
-        </p:spPr>
-        <p:txBody>
-          <a:bodyPr wrap="square" anchor="t" lIns="45720" rIns="45720">
-            <a:spAutoFit/>
-          </a:bodyPr>
-          <a:lstStyle/>
-          <a:p>
-            <a:pPr algn="l"/>
-            <a:r>
-              <a:rPr sz="1300" b="0" i="0">
-                <a:solidFill>
-                  <a:srgbClr val="333333"/>
-                </a:solidFill>
-                <a:latin typeface="Calibri"/>
-              </a:rPr>
-              <a:t>top tells you who; perf tells you what they're doing</a:t>
-            </a:r>
-          </a:p>
-        </p:txBody>
-      </p:sp>
-      <p:sp>
-        <p:nvSpPr>
-          <p:cNvPr id="16" name="Rounded Rectangle 15"/>
-          <p:cNvSpPr/>
-          <p:nvPr/>
-        </p:nvSpPr>
-        <p:spPr>
-          <a:xfrm>
-            <a:off x="822960" y="4727448"/>
-            <a:ext cx="457200" cy="548640"/>
-          </a:xfrm>
-          <a:prstGeom prst="roundRect">
-            <a:avLst/>
-          </a:prstGeom>
-          <a:solidFill>
-            <a:srgbClr val="CC0066"/>
-          </a:solidFill>
-          <a:ln>
-            <a:noFill/>
-          </a:ln>
-          <a:effectLst/>
-        </p:spPr>
-        <p:style>
-          <a:lnRef idx="1">
-            <a:schemeClr val="accent1"/>
-          </a:lnRef>
-          <a:fillRef idx="3">
-            <a:schemeClr val="accent1"/>
-          </a:fillRef>
-          <a:effectRef idx="2">
-            <a:schemeClr val="accent1"/>
-          </a:effectRef>
-          <a:fontRef idx="minor">
-            <a:schemeClr val="lt1"/>
-          </a:fontRef>
-        </p:style>
-        <p:txBody>
-          <a:bodyPr rtlCol="0" anchor="ctr" lIns="0" rIns="0"/>
-          <a:lstStyle/>
-          <a:p>
-            <a:pPr algn="ctr"/>
-            <a:r>
-              <a:rPr sz="2200" b="1">
-                <a:solidFill>
-                  <a:srgbClr val="FFFFFF"/>
-                </a:solidFill>
-                <a:latin typeface="Calibri"/>
-              </a:rPr>
-              <a:t>5</a:t>
-            </a:r>
-          </a:p>
-        </p:txBody>
-      </p:sp>
-      <p:sp>
-        <p:nvSpPr>
-          <p:cNvPr id="17" name="TextBox 16"/>
-          <p:cNvSpPr txBox="1"/>
-          <p:nvPr/>
-        </p:nvSpPr>
-        <p:spPr>
-          <a:xfrm>
-            <a:off x="1417320" y="4727448"/>
-            <a:ext cx="10058400" cy="320040"/>
-          </a:xfrm>
-          <a:prstGeom prst="rect">
-            <a:avLst/>
-          </a:prstGeom>
-          <a:noFill/>
-        </p:spPr>
-        <p:txBody>
-          <a:bodyPr wrap="square" anchor="t" lIns="45720" rIns="45720">
-            <a:spAutoFit/>
-          </a:bodyPr>
-          <a:lstStyle/>
-          <a:p>
-            <a:pPr algn="l"/>
-            <a:r>
-              <a:rPr sz="1600" b="1" i="0">
-                <a:solidFill>
-                  <a:srgbClr val="663399"/>
-                </a:solidFill>
-                <a:latin typeface="Calibri"/>
-              </a:rPr>
-              <a:t>I/O is often the hidden cost</a:t>
-            </a:r>
-          </a:p>
-        </p:txBody>
-      </p:sp>
-      <p:sp>
-        <p:nvSpPr>
-          <p:cNvPr id="18" name="TextBox 17"/>
-          <p:cNvSpPr txBox="1"/>
-          <p:nvPr/>
-        </p:nvSpPr>
-        <p:spPr>
-          <a:xfrm>
-            <a:off x="1417320" y="5038344"/>
-            <a:ext cx="10058400" cy="320040"/>
-          </a:xfrm>
-          <a:prstGeom prst="rect">
-            <a:avLst/>
-          </a:prstGeom>
-          <a:noFill/>
-        </p:spPr>
-        <p:txBody>
-          <a:bodyPr wrap="square" anchor="t" lIns="45720" rIns="45720">
-            <a:spAutoFit/>
-          </a:bodyPr>
-          <a:lstStyle/>
-          <a:p>
-            <a:pPr algn="l"/>
-            <a:r>
-              <a:rPr sz="1300" b="0" i="0">
-                <a:solidFill>
-                  <a:srgbClr val="333333"/>
-                </a:solidFill>
-                <a:latin typeface="Calibri"/>
-              </a:rPr>
-              <a:t>iotop + iostat to find culprits; usually fsync-heavy apps or SD card stalls</a:t>
-            </a:r>
-          </a:p>
-        </p:txBody>
-      </p:sp>
-      <p:sp>
-        <p:nvSpPr>
-          <p:cNvPr id="19" name="Rounded Rectangle 18"/>
-          <p:cNvSpPr/>
-          <p:nvPr/>
-        </p:nvSpPr>
-        <p:spPr>
-          <a:xfrm>
-            <a:off x="822960" y="5669280"/>
-            <a:ext cx="10561320" cy="640080"/>
-          </a:xfrm>
-          <a:prstGeom prst="roundRect">
-            <a:avLst/>
-          </a:prstGeom>
-          <a:solidFill>
-            <a:srgbClr val="FBE6F0"/>
-          </a:solidFill>
-          <a:ln>
-            <a:noFill/>
-          </a:ln>
-          <a:effectLst/>
-        </p:spPr>
-        <p:style>
-          <a:lnRef idx="1">
-            <a:schemeClr val="accent1"/>
-          </a:lnRef>
-          <a:fillRef idx="3">
-            <a:schemeClr val="accent1"/>
-          </a:fillRef>
-          <a:effectRef idx="2">
-            <a:schemeClr val="accent1"/>
-          </a:effectRef>
-          <a:fontRef idx="minor">
-            <a:schemeClr val="lt1"/>
-          </a:fontRef>
-        </p:style>
-        <p:txBody>
-          <a:bodyPr rtlCol="0" anchor="ctr" lIns="228600"/>
-          <a:lstStyle/>
-          <a:p>
-            <a:pPr algn="ctr"/>
-            <a:r>
-              <a:rPr sz="1400" b="1">
-                <a:solidFill>
-                  <a:srgbClr val="663399"/>
-                </a:solidFill>
-                <a:latin typeface="Calibri"/>
-              </a:rPr>
-              <a:t>Next session  →  </a:t>
-            </a:r>
-            <a:r>
-              <a:rPr sz="1400">
-                <a:solidFill>
-                  <a:srgbClr val="333333"/>
-                </a:solidFill>
-                <a:latin typeface="Calibri"/>
-              </a:rPr>
-              <a:t>Updating and Maintaining Devices (45 min)</a:t>
-            </a:r>
-          </a:p>
-        </p:txBody>
-      </p:sp>
-    </p:spTree>
-  </p:cSld>
-  <p:clrMapOvr>
-    <a:masterClrMapping/>
-  </p:clrMapOvr>
-</p:sld>
-</file>
-
-<file path=ppt/slides/slide7.xml><?xml version="1.0" encoding="utf-8"?>
-<p:sld xmlns:a="http://schemas.openxmlformats.org/drawingml/2006/main" xmlns:p="http://schemas.openxmlformats.org/presentationml/2006/main" xmlns:r="http://schemas.openxmlformats.org/officeDocument/2006/relationships">
-  <p:cSld>
-    <p:spTree>
-      <p:nvGrpSpPr>
-        <p:cNvPr id="1" name=""/>
-        <p:cNvGrpSpPr/>
-        <p:nvPr/>
-      </p:nvGrpSpPr>
-      <p:grpSpPr/>
-      <p:sp>
-        <p:nvSpPr>
-          <p:cNvPr id="2" name="Title 1"/>
-          <p:cNvSpPr>
-            <a:spLocks noGrp="1"/>
-          </p:cNvSpPr>
-          <p:nvPr>
-            <p:ph type="ctrTitle"/>
-          </p:nvPr>
-        </p:nvSpPr>
-        <p:spPr/>
-        <p:txBody>
-          <a:bodyPr/>
-          <a:lstStyle/>
-          <a:p>
-            <a:r>
-              <a:rPr sz="4400" b="1">
-                <a:solidFill>
-                  <a:srgbClr val="FFFFFF"/>
-                </a:solidFill>
-                <a:latin typeface="Calibri"/>
-              </a:rPr>
-              <a:t>Performance on Target</a:t>
-            </a:r>
-          </a:p>
-        </p:txBody>
-      </p:sp>
-      <p:sp>
-        <p:nvSpPr>
-          <p:cNvPr id="3" name="Subtitle 2"/>
-          <p:cNvSpPr>
-            <a:spLocks noGrp="1"/>
-          </p:cNvSpPr>
-          <p:nvPr>
-            <p:ph type="subTitle" idx="1"/>
-          </p:nvPr>
-        </p:nvSpPr>
-        <p:spPr/>
-        <p:txBody>
-          <a:bodyPr/>
-          <a:lstStyle/>
-          <a:p>
-            <a:r>
-              <a:rPr sz="2200" i="1">
-                <a:solidFill>
-                  <a:srgbClr val="FFFFFF"/>
-                </a:solidFill>
-                <a:latin typeface="Calibri"/>
-              </a:rPr>
-              <a:t>Day 4 • Session 5 • 75 minutes</a:t>
-            </a:r>
-          </a:p>
-          <a:p>
-            <a:r>
-              <a:rPr sz="1800">
-                <a:solidFill>
-                  <a:srgbClr val="FFFFFF"/>
-                </a:solidFill>
-                <a:latin typeface="Calibri"/>
-              </a:rPr>
-              <a:t>Boot time, memory, CPU, IO</a:t>
-            </a:r>
-          </a:p>
-        </p:txBody>
-      </p:sp>
-    </p:spTree>
-  </p:cSld>
-  <p:clrMapOvr>
-    <a:masterClrMapping/>
-  </p:clrMapOvr>
-</p:sld>
-</file>
-
-<file path=ppt/slides/slide8.xml><?xml version="1.0" encoding="utf-8"?>
-<p:sld xmlns:a="http://schemas.openxmlformats.org/drawingml/2006/main" xmlns:p="http://schemas.openxmlformats.org/presentationml/2006/main" xmlns:r="http://schemas.openxmlformats.org/officeDocument/2006/relationships">
-  <p:cSld>
-    <p:spTree>
-      <p:nvGrpSpPr>
-        <p:cNvPr id="1" name=""/>
-        <p:cNvGrpSpPr/>
-        <p:nvPr/>
-      </p:nvGrpSpPr>
-      <p:grpSpPr/>
-      <p:sp>
-        <p:nvSpPr>
-          <p:cNvPr id="2" name="Title 1"/>
-          <p:cNvSpPr>
-            <a:spLocks noGrp="1"/>
-          </p:cNvSpPr>
-          <p:nvPr>
-            <p:ph type="title"/>
-          </p:nvPr>
-        </p:nvSpPr>
-        <p:spPr/>
-        <p:txBody>
-          <a:bodyPr/>
-          <a:lstStyle/>
-          <a:p>
-            <a:r>
-              <a:rPr sz="3200" b="1">
-                <a:solidFill>
-                  <a:srgbClr val="CC0066"/>
-                </a:solidFill>
-                <a:latin typeface="Calibri"/>
-              </a:rPr>
-              <a:t>Session Agenda</a:t>
-            </a:r>
-          </a:p>
-        </p:txBody>
-      </p:sp>
-      <p:sp>
-        <p:nvSpPr>
-          <p:cNvPr id="3" name="TextBox 2"/>
-          <p:cNvSpPr txBox="1"/>
-          <p:nvPr/>
-        </p:nvSpPr>
-        <p:spPr>
-          <a:xfrm>
-            <a:off x="822960" y="1463040"/>
-            <a:ext cx="10515600" cy="5029200"/>
-          </a:xfrm>
-          <a:prstGeom prst="rect">
-            <a:avLst/>
-          </a:prstGeom>
-          <a:noFill/>
-        </p:spPr>
-        <p:txBody>
-          <a:bodyPr wrap="square" lIns="45720" rIns="45720">
-            <a:spAutoFit/>
-          </a:bodyPr>
-          <a:lstStyle/>
-          <a:p>
-            <a:pPr>
-              <a:spcAft>
-                <a:spcPts val="600"/>
-              </a:spcAft>
-            </a:pPr>
-            <a:r>
-              <a:rPr sz="2000" b="0" i="0">
-                <a:solidFill>
-                  <a:srgbClr val="333333"/>
-                </a:solidFill>
-                <a:latin typeface="Calibri"/>
-              </a:rPr>
-              <a:t>1.  Boot time — measure with systemd-analyze</a:t>
-            </a:r>
-          </a:p>
-          <a:p>
-            <a:pPr>
-              <a:spcAft>
-                <a:spcPts val="600"/>
-              </a:spcAft>
-            </a:pPr>
-            <a:r>
-              <a:rPr sz="2000" b="0" i="0">
-                <a:solidFill>
-                  <a:srgbClr val="333333"/>
-                </a:solidFill>
-                <a:latin typeface="Calibri"/>
-              </a:rPr>
-              <a:t>2.  Boot time — common levers and what each gives you</a:t>
-            </a:r>
-          </a:p>
-          <a:p>
-            <a:pPr>
-              <a:spcAft>
-                <a:spcPts val="600"/>
-              </a:spcAft>
-            </a:pPr>
-            <a:r>
-              <a:rPr sz="2000" b="0" i="0">
-                <a:solidFill>
-                  <a:srgbClr val="333333"/>
-                </a:solidFill>
-                <a:latin typeface="Calibri"/>
-              </a:rPr>
-              <a:t>3.  Memory footprint — free, smem, ps</a:t>
-            </a:r>
-          </a:p>
-          <a:p>
-            <a:pPr>
-              <a:spcAft>
-                <a:spcPts val="600"/>
-              </a:spcAft>
-            </a:pPr>
-            <a:r>
-              <a:rPr sz="2000" b="0" i="0">
-                <a:solidFill>
-                  <a:srgbClr val="333333"/>
-                </a:solidFill>
-                <a:latin typeface="Calibri"/>
-              </a:rPr>
-              <a:t>4.  CPU utilization — top, mpstat, perf</a:t>
-            </a:r>
-          </a:p>
-          <a:p>
-            <a:pPr>
-              <a:spcAft>
-                <a:spcPts val="600"/>
-              </a:spcAft>
-            </a:pPr>
-            <a:r>
-              <a:rPr sz="2000" b="0" i="0">
-                <a:solidFill>
-                  <a:srgbClr val="333333"/>
-                </a:solidFill>
-                <a:latin typeface="Calibri"/>
-              </a:rPr>
-              <a:t>5.  I/O bottlenecks — iotop, iostat</a:t>
-            </a:r>
-          </a:p>
-          <a:p>
-            <a:pPr>
-              <a:spcAft>
-                <a:spcPts val="600"/>
-              </a:spcAft>
-            </a:pPr>
-            <a:r>
-              <a:rPr sz="2000" b="0" i="0">
-                <a:solidFill>
-                  <a:srgbClr val="333333"/>
-                </a:solidFill>
-                <a:latin typeface="Calibri"/>
-              </a:rPr>
-              <a:t>6.  Hands-on measurement on TrainerGW</a:t>
-            </a:r>
-          </a:p>
-        </p:txBody>
-      </p:sp>
-    </p:spTree>
-  </p:cSld>
-  <p:clrMapOvr>
-    <a:masterClrMapping/>
-  </p:clrMapOvr>
-</p:sld>
-</file>
-
-<file path=ppt/slides/slide9.xml><?xml version="1.0" encoding="utf-8"?>
-<p:sld xmlns:a="http://schemas.openxmlformats.org/drawingml/2006/main" xmlns:p="http://schemas.openxmlformats.org/presentationml/2006/main" xmlns:r="http://schemas.openxmlformats.org/officeDocument/2006/relationships">
-  <p:cSld>
-    <p:spTree>
-      <p:nvGrpSpPr>
-        <p:cNvPr id="1" name=""/>
-        <p:cNvGrpSpPr/>
-        <p:nvPr/>
-      </p:nvGrpSpPr>
-      <p:grpSpPr/>
-      <p:sp>
-        <p:nvSpPr>
-          <p:cNvPr id="2" name="Title 1"/>
-          <p:cNvSpPr>
-            <a:spLocks noGrp="1"/>
-          </p:cNvSpPr>
-          <p:nvPr>
-            <p:ph type="title"/>
-          </p:nvPr>
-        </p:nvSpPr>
-        <p:spPr/>
-        <p:txBody>
-          <a:bodyPr/>
-          <a:lstStyle/>
-          <a:p>
-            <a:r>
-              <a:rPr sz="3200" b="1">
-                <a:solidFill>
-                  <a:srgbClr val="CC0066"/>
-                </a:solidFill>
-                <a:latin typeface="Calibri"/>
-              </a:rPr>
-              <a:t>Boot Time — Measurement</a:t>
-            </a:r>
-          </a:p>
-        </p:txBody>
-      </p:sp>
-      <p:sp>
-        <p:nvSpPr>
-          <p:cNvPr id="3" name="TextBox 2"/>
-          <p:cNvSpPr txBox="1"/>
-          <p:nvPr/>
-        </p:nvSpPr>
-        <p:spPr>
-          <a:xfrm>
-            <a:off x="822960" y="1417320"/>
-            <a:ext cx="10515600" cy="365760"/>
-          </a:xfrm>
-          <a:prstGeom prst="rect">
-            <a:avLst/>
-          </a:prstGeom>
-          <a:noFill/>
-        </p:spPr>
-        <p:txBody>
-          <a:bodyPr wrap="square" anchor="t" lIns="45720" rIns="45720">
-            <a:spAutoFit/>
-          </a:bodyPr>
-          <a:lstStyle/>
-          <a:p>
-            <a:pPr algn="l"/>
-            <a:r>
-              <a:rPr sz="1500" b="0" i="1">
-                <a:solidFill>
-                  <a:srgbClr val="666666"/>
-                </a:solidFill>
-                <a:latin typeface="Calibri"/>
-              </a:rPr>
-              <a:t>First, know what you're optimizing.</a:t>
+              <a:t>Apply the tools to TrainerGW. Find one thing to fix.</a:t>
             </a:r>
           </a:p>
         </p:txBody>
@@ -8709,6 +7982,7 @@
           <a:lstStyle/>
           <a:p>
             <a:pPr algn="ctr"/>
+            <a:endParaRPr/>
           </a:p>
         </p:txBody>
       </p:sp>
@@ -8753,6 +8027,7 @@
           <a:lstStyle/>
           <a:p>
             <a:pPr algn="ctr"/>
+            <a:endParaRPr/>
           </a:p>
         </p:txBody>
       </p:sp>
@@ -8790,7 +8065,7 @@
                 </a:solidFill>
                 <a:latin typeface="Consolas"/>
               </a:rPr>
-              <a:t># Overall boot time</a:t>
+              <a:t># Boot TrainerGW and run the lab</a:t>
             </a:r>
           </a:p>
           <a:p>
@@ -8806,6 +8081,38 @@
                 </a:solidFill>
                 <a:latin typeface="Consolas"/>
               </a:rPr>
+              <a:t> </a:t>
+            </a:r>
+          </a:p>
+          <a:p>
+            <a:pPr>
+              <a:spcAft>
+                <a:spcPts val="0"/>
+              </a:spcAft>
+            </a:pPr>
+            <a:r>
+              <a:rPr sz="1000" i="1">
+                <a:solidFill>
+                  <a:srgbClr val="808080"/>
+                </a:solidFill>
+                <a:latin typeface="Consolas"/>
+              </a:rPr>
+              <a:t># 1. Measure boot</a:t>
+            </a:r>
+          </a:p>
+          <a:p>
+            <a:pPr>
+              <a:spcAft>
+                <a:spcPts val="0"/>
+              </a:spcAft>
+            </a:pPr>
+            <a:r>
+              <a:rPr sz="1000">
+                <a:solidFill>
+                  <a:srgbClr val="2D2D2D"/>
+                </a:solidFill>
+                <a:latin typeface="Consolas"/>
+              </a:rPr>
               <a:t>systemd-analyze</a:t>
             </a:r>
           </a:p>
@@ -8816,13 +8123,109 @@
               </a:spcAft>
             </a:pPr>
             <a:r>
+              <a:rPr sz="1000">
+                <a:solidFill>
+                  <a:srgbClr val="2D2D2D"/>
+                </a:solidFill>
+                <a:latin typeface="Consolas"/>
+              </a:rPr>
+              <a:t>systemd-analyze blame | head -10</a:t>
+            </a:r>
+          </a:p>
+          <a:p>
+            <a:pPr>
+              <a:spcAft>
+                <a:spcPts val="0"/>
+              </a:spcAft>
+            </a:pPr>
+            <a:r>
+              <a:rPr sz="1000">
+                <a:solidFill>
+                  <a:srgbClr val="2D2D2D"/>
+                </a:solidFill>
+                <a:latin typeface="Consolas"/>
+              </a:rPr>
+              <a:t>systemd-analyze critical-chain</a:t>
+            </a:r>
+          </a:p>
+          <a:p>
+            <a:pPr>
+              <a:spcAft>
+                <a:spcPts val="0"/>
+              </a:spcAft>
+            </a:pPr>
+            <a:r>
+              <a:rPr sz="1000">
+                <a:solidFill>
+                  <a:srgbClr val="2D2D2D"/>
+                </a:solidFill>
+                <a:latin typeface="Consolas"/>
+              </a:rPr>
+              <a:t> </a:t>
+            </a:r>
+          </a:p>
+          <a:p>
+            <a:pPr>
+              <a:spcAft>
+                <a:spcPts val="0"/>
+              </a:spcAft>
+            </a:pPr>
+            <a:r>
               <a:rPr sz="1000" i="1">
                 <a:solidFill>
                   <a:srgbClr val="808080"/>
                 </a:solidFill>
                 <a:latin typeface="Consolas"/>
               </a:rPr>
-              <a:t># Startup finished in 1.234s (kernel) + 5.678s (userspace) = 6.912s</a:t>
+              <a:t># 2. Identify the slowest service. Investigate why.</a:t>
+            </a:r>
+          </a:p>
+          <a:p>
+            <a:pPr>
+              <a:spcAft>
+                <a:spcPts val="0"/>
+              </a:spcAft>
+            </a:pPr>
+            <a:r>
+              <a:rPr sz="1000">
+                <a:solidFill>
+                  <a:srgbClr val="2D2D2D"/>
+                </a:solidFill>
+                <a:latin typeface="Consolas"/>
+              </a:rPr>
+              <a:t>systemctl status &lt;slow-service&gt;</a:t>
+            </a:r>
+          </a:p>
+          <a:p>
+            <a:pPr>
+              <a:spcAft>
+                <a:spcPts val="0"/>
+              </a:spcAft>
+            </a:pPr>
+            <a:r>
+              <a:rPr sz="1000">
+                <a:solidFill>
+                  <a:srgbClr val="2D2D2D"/>
+                </a:solidFill>
+                <a:latin typeface="Consolas"/>
+              </a:rPr>
+              <a:t>journalctl -u &lt;slow-service&gt;</a:t>
+            </a:r>
+          </a:p>
+          <a:p>
+            <a:pPr>
+              <a:spcAft>
+                <a:spcPts val="0"/>
+              </a:spcAft>
+            </a:pPr>
+            <a:r>
+              <a:rPr sz="1000">
+                <a:solidFill>
+                  <a:srgbClr val="2D2D2D"/>
+                </a:solidFill>
+                <a:latin typeface="Consolas"/>
+              </a:rPr>
+              <a:t> </a:t>
             </a:r>
           </a:p>
           <a:p>
@@ -8838,7 +8241,7 @@
                 </a:solidFill>
                 <a:latin typeface="Consolas"/>
               </a:rPr>
-              <a:t># multi-user.target reached after 5.678s in userspace.</a:t>
+              <a:t># 3. Memory snapshot</a:t>
             </a:r>
           </a:p>
           <a:p>
@@ -8854,6 +8257,38 @@
                 </a:solidFill>
                 <a:latin typeface="Consolas"/>
               </a:rPr>
+              <a:t>free -h</a:t>
+            </a:r>
+          </a:p>
+          <a:p>
+            <a:pPr>
+              <a:spcAft>
+                <a:spcPts val="0"/>
+              </a:spcAft>
+            </a:pPr>
+            <a:r>
+              <a:rPr sz="1000">
+                <a:solidFill>
+                  <a:srgbClr val="2D2D2D"/>
+                </a:solidFill>
+                <a:latin typeface="Consolas"/>
+              </a:rPr>
+              <a:t>ps aux --sort=-rss | head</a:t>
+            </a:r>
+          </a:p>
+          <a:p>
+            <a:pPr>
+              <a:spcAft>
+                <a:spcPts val="0"/>
+              </a:spcAft>
+            </a:pPr>
+            <a:r>
+              <a:rPr sz="1000">
+                <a:solidFill>
+                  <a:srgbClr val="2D2D2D"/>
+                </a:solidFill>
+                <a:latin typeface="Consolas"/>
+              </a:rPr>
               <a:t> </a:t>
             </a:r>
           </a:p>
@@ -8870,7 +8305,7 @@
                 </a:solidFill>
                 <a:latin typeface="Consolas"/>
               </a:rPr>
-              <a:t># What took longest in userspace</a:t>
+              <a:t># 4. CPU under load — generate some</a:t>
             </a:r>
           </a:p>
           <a:p>
@@ -8886,7 +8321,55 @@
                 </a:solidFill>
                 <a:latin typeface="Consolas"/>
               </a:rPr>
-              <a:t>systemd-analyze blame</a:t>
+              <a:t>yes &gt; /dev/null &amp;</a:t>
+            </a:r>
+          </a:p>
+          <a:p>
+            <a:pPr>
+              <a:spcAft>
+                <a:spcPts val="0"/>
+              </a:spcAft>
+            </a:pPr>
+            <a:r>
+              <a:rPr sz="1000">
+                <a:solidFill>
+                  <a:srgbClr val="2D2D2D"/>
+                </a:solidFill>
+                <a:latin typeface="Consolas"/>
+              </a:rPr>
+              <a:t>yes &gt; /dev/null &amp;</a:t>
+            </a:r>
+          </a:p>
+          <a:p>
+            <a:pPr>
+              <a:spcAft>
+                <a:spcPts val="0"/>
+              </a:spcAft>
+            </a:pPr>
+            <a:r>
+              <a:rPr sz="1000">
+                <a:solidFill>
+                  <a:srgbClr val="2D2D2D"/>
+                </a:solidFill>
+                <a:latin typeface="Consolas"/>
+              </a:rPr>
+              <a:t>top  # observe; pkill yes when done</a:t>
+            </a:r>
+          </a:p>
+          <a:p>
+            <a:pPr>
+              <a:spcAft>
+                <a:spcPts val="0"/>
+              </a:spcAft>
+            </a:pPr>
+            <a:r>
+              <a:rPr sz="1000">
+                <a:solidFill>
+                  <a:srgbClr val="2D2D2D"/>
+                </a:solidFill>
+                <a:latin typeface="Consolas"/>
+              </a:rPr>
+              <a:t> </a:t>
             </a:r>
           </a:p>
           <a:p>
@@ -8902,7 +8385,71 @@
                 </a:solidFill>
                 <a:latin typeface="Consolas"/>
               </a:rPr>
-              <a:t># 2.341s nginx.service</a:t>
+              <a:t># 5. I/O test</a:t>
+            </a:r>
+          </a:p>
+          <a:p>
+            <a:pPr>
+              <a:spcAft>
+                <a:spcPts val="0"/>
+              </a:spcAft>
+            </a:pPr>
+            <a:r>
+              <a:rPr sz="1000">
+                <a:solidFill>
+                  <a:srgbClr val="2D2D2D"/>
+                </a:solidFill>
+                <a:latin typeface="Consolas"/>
+              </a:rPr>
+              <a:t>dd if=/dev/zero of=/tmp/iotest bs=1M count=100 conv=fdatasync</a:t>
+            </a:r>
+          </a:p>
+          <a:p>
+            <a:pPr>
+              <a:spcAft>
+                <a:spcPts val="0"/>
+              </a:spcAft>
+            </a:pPr>
+            <a:r>
+              <a:rPr sz="1000">
+                <a:solidFill>
+                  <a:srgbClr val="2D2D2D"/>
+                </a:solidFill>
+                <a:latin typeface="Consolas"/>
+              </a:rPr>
+              <a:t>iostat -x 2 5 &amp;</a:t>
+            </a:r>
+          </a:p>
+          <a:p>
+            <a:pPr>
+              <a:spcAft>
+                <a:spcPts val="0"/>
+              </a:spcAft>
+            </a:pPr>
+            <a:r>
+              <a:rPr sz="1000">
+                <a:solidFill>
+                  <a:srgbClr val="2D2D2D"/>
+                </a:solidFill>
+                <a:latin typeface="Consolas"/>
+              </a:rPr>
+              <a:t>dd if=/dev/zero of=/tmp/iotest bs=1M count=100 conv=fdatasync</a:t>
+            </a:r>
+          </a:p>
+          <a:p>
+            <a:pPr>
+              <a:spcAft>
+                <a:spcPts val="0"/>
+              </a:spcAft>
+            </a:pPr>
+            <a:r>
+              <a:rPr sz="1000">
+                <a:solidFill>
+                  <a:srgbClr val="2D2D2D"/>
+                </a:solidFill>
+                <a:latin typeface="Consolas"/>
+              </a:rPr>
+              <a:t> </a:t>
             </a:r>
           </a:p>
           <a:p>
@@ -8918,247 +8465,771 @@
                 </a:solidFill>
                 <a:latin typeface="Consolas"/>
               </a:rPr>
-              <a:t># 1.234s NetworkManager.service</a:t>
-            </a:r>
-          </a:p>
-          <a:p>
-            <a:pPr>
-              <a:spcAft>
-                <a:spcPts val="0"/>
-              </a:spcAft>
-            </a:pPr>
-            <a:r>
-              <a:rPr sz="1000" i="1">
-                <a:solidFill>
-                  <a:srgbClr val="808080"/>
-                </a:solidFill>
-                <a:latin typeface="Consolas"/>
-              </a:rPr>
-              <a:t># 0.876s systemd-journal-flush.service</a:t>
-            </a:r>
-          </a:p>
-          <a:p>
-            <a:pPr>
-              <a:spcAft>
-                <a:spcPts val="0"/>
-              </a:spcAft>
-            </a:pPr>
-            <a:r>
-              <a:rPr sz="1000" i="1">
-                <a:solidFill>
-                  <a:srgbClr val="808080"/>
-                </a:solidFill>
-                <a:latin typeface="Consolas"/>
-              </a:rPr>
-              <a:t># ...</a:t>
-            </a:r>
-          </a:p>
-          <a:p>
-            <a:pPr>
-              <a:spcAft>
-                <a:spcPts val="0"/>
-              </a:spcAft>
-            </a:pPr>
-            <a:r>
-              <a:rPr sz="1000">
-                <a:solidFill>
-                  <a:srgbClr val="2D2D2D"/>
-                </a:solidFill>
-                <a:latin typeface="Consolas"/>
-              </a:rPr>
-              <a:t> </a:t>
-            </a:r>
-          </a:p>
-          <a:p>
-            <a:pPr>
-              <a:spcAft>
-                <a:spcPts val="0"/>
-              </a:spcAft>
-            </a:pPr>
-            <a:r>
-              <a:rPr sz="1000" i="1">
-                <a:solidFill>
-                  <a:srgbClr val="808080"/>
-                </a:solidFill>
-                <a:latin typeface="Consolas"/>
-              </a:rPr>
-              <a:t># Critical chain — what's actually blocking boot completion</a:t>
-            </a:r>
-          </a:p>
-          <a:p>
-            <a:pPr>
-              <a:spcAft>
-                <a:spcPts val="0"/>
-              </a:spcAft>
-            </a:pPr>
-            <a:r>
-              <a:rPr sz="1000">
-                <a:solidFill>
-                  <a:srgbClr val="2D2D2D"/>
-                </a:solidFill>
-                <a:latin typeface="Consolas"/>
-              </a:rPr>
-              <a:t>systemd-analyze critical-chain</a:t>
-            </a:r>
-          </a:p>
-          <a:p>
-            <a:pPr>
-              <a:spcAft>
-                <a:spcPts val="0"/>
-              </a:spcAft>
-            </a:pPr>
-            <a:r>
-              <a:rPr sz="1000">
-                <a:solidFill>
-                  <a:srgbClr val="2D2D2D"/>
-                </a:solidFill>
-                <a:latin typeface="Consolas"/>
-              </a:rPr>
-              <a:t> </a:t>
-            </a:r>
-          </a:p>
-          <a:p>
-            <a:pPr>
-              <a:spcAft>
-                <a:spcPts val="0"/>
-              </a:spcAft>
-            </a:pPr>
-            <a:r>
-              <a:rPr sz="1000" i="1">
-                <a:solidFill>
-                  <a:srgbClr val="808080"/>
-                </a:solidFill>
-                <a:latin typeface="Consolas"/>
-              </a:rPr>
-              <a:t># Render a visual SVG plot</a:t>
-            </a:r>
-          </a:p>
-          <a:p>
-            <a:pPr>
-              <a:spcAft>
-                <a:spcPts val="0"/>
-              </a:spcAft>
-            </a:pPr>
-            <a:r>
-              <a:rPr sz="1000">
-                <a:solidFill>
-                  <a:srgbClr val="2D2D2D"/>
-                </a:solidFill>
-                <a:latin typeface="Consolas"/>
-              </a:rPr>
-              <a:t>systemd-analyze plot &gt; boot.svg</a:t>
-            </a:r>
-          </a:p>
-          <a:p>
-            <a:pPr>
-              <a:spcAft>
-                <a:spcPts val="0"/>
-              </a:spcAft>
-            </a:pPr>
-            <a:r>
-              <a:rPr sz="1000" i="1">
-                <a:solidFill>
-                  <a:srgbClr val="808080"/>
-                </a:solidFill>
-                <a:latin typeface="Consolas"/>
-              </a:rPr>
-              <a:t># View on host with a browser</a:t>
-            </a:r>
-          </a:p>
-          <a:p>
-            <a:pPr>
-              <a:spcAft>
-                <a:spcPts val="0"/>
-              </a:spcAft>
-            </a:pPr>
-            <a:r>
-              <a:rPr sz="1000">
-                <a:solidFill>
-                  <a:srgbClr val="2D2D2D"/>
-                </a:solidFill>
-                <a:latin typeface="Consolas"/>
-              </a:rPr>
-              <a:t> </a:t>
-            </a:r>
-          </a:p>
-          <a:p>
-            <a:pPr>
-              <a:spcAft>
-                <a:spcPts val="0"/>
-              </a:spcAft>
-            </a:pPr>
-            <a:r>
-              <a:rPr sz="1000" i="1">
-                <a:solidFill>
-                  <a:srgbClr val="808080"/>
-                </a:solidFill>
-                <a:latin typeface="Consolas"/>
-              </a:rPr>
-              <a:t># Kernel-side timing per initcall</a:t>
-            </a:r>
-          </a:p>
-          <a:p>
-            <a:pPr>
-              <a:spcAft>
-                <a:spcPts val="0"/>
-              </a:spcAft>
-            </a:pPr>
-            <a:r>
-              <a:rPr sz="1000" i="1">
-                <a:solidFill>
-                  <a:srgbClr val="808080"/>
-                </a:solidFill>
-                <a:latin typeface="Consolas"/>
-              </a:rPr>
-              <a:t># Add 'initcall_debug' to bootargs in U-Boot</a:t>
-            </a:r>
-          </a:p>
-          <a:p>
-            <a:pPr>
-              <a:spcAft>
-                <a:spcPts val="0"/>
-              </a:spcAft>
-            </a:pPr>
-            <a:r>
-              <a:rPr sz="1000" i="1">
-                <a:solidFill>
-                  <a:srgbClr val="808080"/>
-                </a:solidFill>
-                <a:latin typeface="Consolas"/>
-              </a:rPr>
-              <a:t># Then on boot:</a:t>
-            </a:r>
-          </a:p>
-          <a:p>
-            <a:pPr>
-              <a:spcAft>
-                <a:spcPts val="0"/>
-              </a:spcAft>
-            </a:pPr>
-            <a:r>
-              <a:rPr sz="1000">
-                <a:solidFill>
-                  <a:srgbClr val="2D2D2D"/>
-                </a:solidFill>
-                <a:latin typeface="Consolas"/>
-              </a:rPr>
-              <a:t>dmesg | grep 'initcall.*took'</a:t>
-            </a:r>
-          </a:p>
-          <a:p>
-            <a:pPr>
-              <a:spcAft>
-                <a:spcPts val="0"/>
-              </a:spcAft>
-            </a:pPr>
-            <a:r>
-              <a:rPr sz="1000">
-                <a:solidFill>
-                  <a:srgbClr val="2D2D2D"/>
-                </a:solidFill>
-                <a:latin typeface="Consolas"/>
-              </a:rPr>
-              <a:t>dmesg | awk '/initcall.*took/ {print $NF, $0}' | sort -n | tail</a:t>
+              <a:t># 6. Optional: apply one optimization and re-measure</a:t>
+            </a:r>
+          </a:p>
+        </p:txBody>
+      </p:sp>
+    </p:spTree>
+  </p:cSld>
+  <p:clrMapOvr>
+    <a:masterClrMapping/>
+  </p:clrMapOvr>
+</p:sld>
+</file>
+
+<file path=ppt/slides/slide9.xml><?xml version="1.0" encoding="utf-8"?>
+<p:sld xmlns:a="http://schemas.openxmlformats.org/drawingml/2006/main" xmlns:r="http://schemas.openxmlformats.org/officeDocument/2006/relationships" xmlns:p="http://schemas.openxmlformats.org/presentationml/2006/main">
+  <p:cSld>
+    <p:spTree>
+      <p:nvGrpSpPr>
+        <p:cNvPr id="1" name=""/>
+        <p:cNvGrpSpPr/>
+        <p:nvPr/>
+      </p:nvGrpSpPr>
+      <p:grpSpPr>
+        <a:xfrm>
+          <a:off x="0" y="0"/>
+          <a:ext cx="0" cy="0"/>
+          <a:chOff x="0" y="0"/>
+          <a:chExt cx="0" cy="0"/>
+        </a:xfrm>
+      </p:grpSpPr>
+      <p:sp>
+        <p:nvSpPr>
+          <p:cNvPr id="2" name="Title 1"/>
+          <p:cNvSpPr>
+            <a:spLocks noGrp="1"/>
+          </p:cNvSpPr>
+          <p:nvPr>
+            <p:ph type="title"/>
+          </p:nvPr>
+        </p:nvSpPr>
+        <p:spPr/>
+        <p:txBody>
+          <a:bodyPr/>
+          <a:lstStyle/>
+          <a:p>
+            <a:r>
+              <a:rPr sz="3200" b="1">
+                <a:solidFill>
+                  <a:srgbClr val="663399"/>
+                </a:solidFill>
+                <a:latin typeface="Calibri"/>
+              </a:rPr>
+              <a:t>Session Summary</a:t>
+            </a:r>
+          </a:p>
+        </p:txBody>
+      </p:sp>
+      <p:sp>
+        <p:nvSpPr>
+          <p:cNvPr id="3" name="TextBox 2"/>
+          <p:cNvSpPr txBox="1"/>
+          <p:nvPr/>
+        </p:nvSpPr>
+        <p:spPr>
+          <a:xfrm>
+            <a:off x="822960" y="1417320"/>
+            <a:ext cx="10515600" cy="365760"/>
+          </a:xfrm>
+          <a:prstGeom prst="rect">
+            <a:avLst/>
+          </a:prstGeom>
+          <a:noFill/>
+        </p:spPr>
+        <p:txBody>
+          <a:bodyPr wrap="square" lIns="45720" rIns="45720" anchor="t">
+            <a:spAutoFit/>
+          </a:bodyPr>
+          <a:lstStyle/>
+          <a:p>
+            <a:pPr algn="l"/>
+            <a:r>
+              <a:rPr sz="1500" b="0" i="1">
+                <a:solidFill>
+                  <a:srgbClr val="666666"/>
+                </a:solidFill>
+                <a:latin typeface="Calibri"/>
+              </a:rPr>
+              <a:t>5 things to remember from this session.</a:t>
+            </a:r>
+          </a:p>
+        </p:txBody>
+      </p:sp>
+      <p:sp>
+        <p:nvSpPr>
+          <p:cNvPr id="4" name="Rounded Rectangle 3"/>
+          <p:cNvSpPr/>
+          <p:nvPr/>
+        </p:nvSpPr>
+        <p:spPr>
+          <a:xfrm>
+            <a:off x="822960" y="1874519"/>
+            <a:ext cx="457200" cy="548640"/>
+          </a:xfrm>
+          <a:prstGeom prst="roundRect">
+            <a:avLst/>
+          </a:prstGeom>
+          <a:solidFill>
+            <a:srgbClr val="CC0066"/>
+          </a:solidFill>
+          <a:ln>
+            <a:noFill/>
+          </a:ln>
+          <a:effectLst/>
+        </p:spPr>
+        <p:style>
+          <a:lnRef idx="1">
+            <a:schemeClr val="accent1"/>
+          </a:lnRef>
+          <a:fillRef idx="3">
+            <a:schemeClr val="accent1"/>
+          </a:fillRef>
+          <a:effectRef idx="2">
+            <a:schemeClr val="accent1"/>
+          </a:effectRef>
+          <a:fontRef idx="minor">
+            <a:schemeClr val="lt1"/>
+          </a:fontRef>
+        </p:style>
+        <p:txBody>
+          <a:bodyPr lIns="0" rIns="0" rtlCol="0" anchor="ctr"/>
+          <a:lstStyle/>
+          <a:p>
+            <a:pPr algn="ctr"/>
+            <a:r>
+              <a:rPr sz="2200" b="1">
+                <a:solidFill>
+                  <a:srgbClr val="FFFFFF"/>
+                </a:solidFill>
+                <a:latin typeface="Calibri"/>
+              </a:rPr>
+              <a:t>1</a:t>
+            </a:r>
+          </a:p>
+        </p:txBody>
+      </p:sp>
+      <p:sp>
+        <p:nvSpPr>
+          <p:cNvPr id="5" name="TextBox 4"/>
+          <p:cNvSpPr txBox="1"/>
+          <p:nvPr/>
+        </p:nvSpPr>
+        <p:spPr>
+          <a:xfrm>
+            <a:off x="1417320" y="1874519"/>
+            <a:ext cx="10058400" cy="320040"/>
+          </a:xfrm>
+          <a:prstGeom prst="rect">
+            <a:avLst/>
+          </a:prstGeom>
+          <a:noFill/>
+        </p:spPr>
+        <p:txBody>
+          <a:bodyPr wrap="square" lIns="45720" rIns="45720" anchor="t">
+            <a:spAutoFit/>
+          </a:bodyPr>
+          <a:lstStyle/>
+          <a:p>
+            <a:pPr algn="l"/>
+            <a:r>
+              <a:rPr sz="1600" b="1" i="0">
+                <a:solidFill>
+                  <a:srgbClr val="663399"/>
+                </a:solidFill>
+                <a:latin typeface="Calibri"/>
+              </a:rPr>
+              <a:t>systemd-analyze is the start of boot-time work</a:t>
+            </a:r>
+          </a:p>
+        </p:txBody>
+      </p:sp>
+      <p:sp>
+        <p:nvSpPr>
+          <p:cNvPr id="6" name="TextBox 5"/>
+          <p:cNvSpPr txBox="1"/>
+          <p:nvPr/>
+        </p:nvSpPr>
+        <p:spPr>
+          <a:xfrm>
+            <a:off x="1417320" y="2185415"/>
+            <a:ext cx="10058400" cy="320040"/>
+          </a:xfrm>
+          <a:prstGeom prst="rect">
+            <a:avLst/>
+          </a:prstGeom>
+          <a:noFill/>
+        </p:spPr>
+        <p:txBody>
+          <a:bodyPr wrap="square" lIns="45720" rIns="45720" anchor="t">
+            <a:spAutoFit/>
+          </a:bodyPr>
+          <a:lstStyle/>
+          <a:p>
+            <a:pPr algn="l"/>
+            <a:r>
+              <a:rPr sz="1300" b="0" i="0">
+                <a:solidFill>
+                  <a:srgbClr val="333333"/>
+                </a:solidFill>
+                <a:latin typeface="Calibri"/>
+              </a:rPr>
+              <a:t>Overall, blame, critical-chain, plot — four commands cover most of it</a:t>
+            </a:r>
+          </a:p>
+        </p:txBody>
+      </p:sp>
+      <p:sp>
+        <p:nvSpPr>
+          <p:cNvPr id="7" name="Rounded Rectangle 6"/>
+          <p:cNvSpPr/>
+          <p:nvPr/>
+        </p:nvSpPr>
+        <p:spPr>
+          <a:xfrm>
+            <a:off x="822960" y="2587752"/>
+            <a:ext cx="457200" cy="548640"/>
+          </a:xfrm>
+          <a:prstGeom prst="roundRect">
+            <a:avLst/>
+          </a:prstGeom>
+          <a:solidFill>
+            <a:srgbClr val="CC0066"/>
+          </a:solidFill>
+          <a:ln>
+            <a:noFill/>
+          </a:ln>
+          <a:effectLst/>
+        </p:spPr>
+        <p:style>
+          <a:lnRef idx="1">
+            <a:schemeClr val="accent1"/>
+          </a:lnRef>
+          <a:fillRef idx="3">
+            <a:schemeClr val="accent1"/>
+          </a:fillRef>
+          <a:effectRef idx="2">
+            <a:schemeClr val="accent1"/>
+          </a:effectRef>
+          <a:fontRef idx="minor">
+            <a:schemeClr val="lt1"/>
+          </a:fontRef>
+        </p:style>
+        <p:txBody>
+          <a:bodyPr lIns="0" rIns="0" rtlCol="0" anchor="ctr"/>
+          <a:lstStyle/>
+          <a:p>
+            <a:pPr algn="ctr"/>
+            <a:r>
+              <a:rPr sz="2200" b="1">
+                <a:solidFill>
+                  <a:srgbClr val="FFFFFF"/>
+                </a:solidFill>
+                <a:latin typeface="Calibri"/>
+              </a:rPr>
+              <a:t>2</a:t>
+            </a:r>
+          </a:p>
+        </p:txBody>
+      </p:sp>
+      <p:sp>
+        <p:nvSpPr>
+          <p:cNvPr id="8" name="TextBox 7"/>
+          <p:cNvSpPr txBox="1"/>
+          <p:nvPr/>
+        </p:nvSpPr>
+        <p:spPr>
+          <a:xfrm>
+            <a:off x="1417320" y="2587752"/>
+            <a:ext cx="10058400" cy="320040"/>
+          </a:xfrm>
+          <a:prstGeom prst="rect">
+            <a:avLst/>
+          </a:prstGeom>
+          <a:noFill/>
+        </p:spPr>
+        <p:txBody>
+          <a:bodyPr wrap="square" lIns="45720" rIns="45720" anchor="t">
+            <a:spAutoFit/>
+          </a:bodyPr>
+          <a:lstStyle/>
+          <a:p>
+            <a:pPr algn="l"/>
+            <a:r>
+              <a:rPr sz="1600" b="1" i="0">
+                <a:solidFill>
+                  <a:srgbClr val="663399"/>
+                </a:solidFill>
+                <a:latin typeface="Calibri"/>
+              </a:rPr>
+              <a:t>Five common boot-time levers give cumulative savings</a:t>
+            </a:r>
+          </a:p>
+        </p:txBody>
+      </p:sp>
+      <p:sp>
+        <p:nvSpPr>
+          <p:cNvPr id="9" name="TextBox 8"/>
+          <p:cNvSpPr txBox="1"/>
+          <p:nvPr/>
+        </p:nvSpPr>
+        <p:spPr>
+          <a:xfrm>
+            <a:off x="1417320" y="2898648"/>
+            <a:ext cx="10058400" cy="320040"/>
+          </a:xfrm>
+          <a:prstGeom prst="rect">
+            <a:avLst/>
+          </a:prstGeom>
+          <a:noFill/>
+        </p:spPr>
+        <p:txBody>
+          <a:bodyPr wrap="square" lIns="45720" rIns="45720" anchor="t">
+            <a:spAutoFit/>
+          </a:bodyPr>
+          <a:lstStyle/>
+          <a:p>
+            <a:pPr algn="l"/>
+            <a:r>
+              <a:rPr sz="1300" b="0" i="0">
+                <a:solidFill>
+                  <a:srgbClr val="333333"/>
+                </a:solidFill>
+                <a:latin typeface="Calibri"/>
+              </a:rPr>
+              <a:t>Disable services, strip kernel debug, drop initramfs, quiet boot, dash</a:t>
+            </a:r>
+          </a:p>
+        </p:txBody>
+      </p:sp>
+      <p:sp>
+        <p:nvSpPr>
+          <p:cNvPr id="10" name="Rounded Rectangle 9"/>
+          <p:cNvSpPr/>
+          <p:nvPr/>
+        </p:nvSpPr>
+        <p:spPr>
+          <a:xfrm>
+            <a:off x="822960" y="3300984"/>
+            <a:ext cx="457200" cy="548640"/>
+          </a:xfrm>
+          <a:prstGeom prst="roundRect">
+            <a:avLst/>
+          </a:prstGeom>
+          <a:solidFill>
+            <a:srgbClr val="CC0066"/>
+          </a:solidFill>
+          <a:ln>
+            <a:noFill/>
+          </a:ln>
+          <a:effectLst/>
+        </p:spPr>
+        <p:style>
+          <a:lnRef idx="1">
+            <a:schemeClr val="accent1"/>
+          </a:lnRef>
+          <a:fillRef idx="3">
+            <a:schemeClr val="accent1"/>
+          </a:fillRef>
+          <a:effectRef idx="2">
+            <a:schemeClr val="accent1"/>
+          </a:effectRef>
+          <a:fontRef idx="minor">
+            <a:schemeClr val="lt1"/>
+          </a:fontRef>
+        </p:style>
+        <p:txBody>
+          <a:bodyPr lIns="0" rIns="0" rtlCol="0" anchor="ctr"/>
+          <a:lstStyle/>
+          <a:p>
+            <a:pPr algn="ctr"/>
+            <a:r>
+              <a:rPr sz="2200" b="1">
+                <a:solidFill>
+                  <a:srgbClr val="FFFFFF"/>
+                </a:solidFill>
+                <a:latin typeface="Calibri"/>
+              </a:rPr>
+              <a:t>3</a:t>
+            </a:r>
+          </a:p>
+        </p:txBody>
+      </p:sp>
+      <p:sp>
+        <p:nvSpPr>
+          <p:cNvPr id="11" name="TextBox 10"/>
+          <p:cNvSpPr txBox="1"/>
+          <p:nvPr/>
+        </p:nvSpPr>
+        <p:spPr>
+          <a:xfrm>
+            <a:off x="1417320" y="3300984"/>
+            <a:ext cx="10058400" cy="320040"/>
+          </a:xfrm>
+          <a:prstGeom prst="rect">
+            <a:avLst/>
+          </a:prstGeom>
+          <a:noFill/>
+        </p:spPr>
+        <p:txBody>
+          <a:bodyPr wrap="square" lIns="45720" rIns="45720" anchor="t">
+            <a:spAutoFit/>
+          </a:bodyPr>
+          <a:lstStyle/>
+          <a:p>
+            <a:pPr algn="l"/>
+            <a:r>
+              <a:rPr sz="1600" b="1" i="0">
+                <a:solidFill>
+                  <a:srgbClr val="663399"/>
+                </a:solidFill>
+                <a:latin typeface="Calibri"/>
+              </a:rPr>
+              <a:t>Memory: free + smem give different but useful views</a:t>
+            </a:r>
+          </a:p>
+        </p:txBody>
+      </p:sp>
+      <p:sp>
+        <p:nvSpPr>
+          <p:cNvPr id="12" name="TextBox 11"/>
+          <p:cNvSpPr txBox="1"/>
+          <p:nvPr/>
+        </p:nvSpPr>
+        <p:spPr>
+          <a:xfrm>
+            <a:off x="1417320" y="3611879"/>
+            <a:ext cx="10058400" cy="320040"/>
+          </a:xfrm>
+          <a:prstGeom prst="rect">
+            <a:avLst/>
+          </a:prstGeom>
+          <a:noFill/>
+        </p:spPr>
+        <p:txBody>
+          <a:bodyPr wrap="square" lIns="45720" rIns="45720" anchor="t">
+            <a:spAutoFit/>
+          </a:bodyPr>
+          <a:lstStyle/>
+          <a:p>
+            <a:pPr algn="l"/>
+            <a:r>
+              <a:rPr sz="1300" b="0" i="0">
+                <a:solidFill>
+                  <a:srgbClr val="333333"/>
+                </a:solidFill>
+                <a:latin typeface="Calibri"/>
+              </a:rPr>
+              <a:t>Use smem for accurate per-process accounting (PSS vs RSS)</a:t>
+            </a:r>
+          </a:p>
+        </p:txBody>
+      </p:sp>
+      <p:sp>
+        <p:nvSpPr>
+          <p:cNvPr id="13" name="Rounded Rectangle 12"/>
+          <p:cNvSpPr/>
+          <p:nvPr/>
+        </p:nvSpPr>
+        <p:spPr>
+          <a:xfrm>
+            <a:off x="822960" y="4014215"/>
+            <a:ext cx="457200" cy="548640"/>
+          </a:xfrm>
+          <a:prstGeom prst="roundRect">
+            <a:avLst/>
+          </a:prstGeom>
+          <a:solidFill>
+            <a:srgbClr val="CC0066"/>
+          </a:solidFill>
+          <a:ln>
+            <a:noFill/>
+          </a:ln>
+          <a:effectLst/>
+        </p:spPr>
+        <p:style>
+          <a:lnRef idx="1">
+            <a:schemeClr val="accent1"/>
+          </a:lnRef>
+          <a:fillRef idx="3">
+            <a:schemeClr val="accent1"/>
+          </a:fillRef>
+          <a:effectRef idx="2">
+            <a:schemeClr val="accent1"/>
+          </a:effectRef>
+          <a:fontRef idx="minor">
+            <a:schemeClr val="lt1"/>
+          </a:fontRef>
+        </p:style>
+        <p:txBody>
+          <a:bodyPr lIns="0" rIns="0" rtlCol="0" anchor="ctr"/>
+          <a:lstStyle/>
+          <a:p>
+            <a:pPr algn="ctr"/>
+            <a:r>
+              <a:rPr sz="2200" b="1">
+                <a:solidFill>
+                  <a:srgbClr val="FFFFFF"/>
+                </a:solidFill>
+                <a:latin typeface="Calibri"/>
+              </a:rPr>
+              <a:t>4</a:t>
+            </a:r>
+          </a:p>
+        </p:txBody>
+      </p:sp>
+      <p:sp>
+        <p:nvSpPr>
+          <p:cNvPr id="14" name="TextBox 13"/>
+          <p:cNvSpPr txBox="1"/>
+          <p:nvPr/>
+        </p:nvSpPr>
+        <p:spPr>
+          <a:xfrm>
+            <a:off x="1417320" y="4014215"/>
+            <a:ext cx="10058400" cy="320040"/>
+          </a:xfrm>
+          <a:prstGeom prst="rect">
+            <a:avLst/>
+          </a:prstGeom>
+          <a:noFill/>
+        </p:spPr>
+        <p:txBody>
+          <a:bodyPr wrap="square" lIns="45720" rIns="45720" anchor="t">
+            <a:spAutoFit/>
+          </a:bodyPr>
+          <a:lstStyle/>
+          <a:p>
+            <a:pPr algn="l"/>
+            <a:r>
+              <a:rPr sz="1600" b="1" i="0">
+                <a:solidFill>
+                  <a:srgbClr val="663399"/>
+                </a:solidFill>
+                <a:latin typeface="Calibri"/>
+              </a:rPr>
+              <a:t>CPU profiling = top + perf</a:t>
+            </a:r>
+          </a:p>
+        </p:txBody>
+      </p:sp>
+      <p:sp>
+        <p:nvSpPr>
+          <p:cNvPr id="15" name="TextBox 14"/>
+          <p:cNvSpPr txBox="1"/>
+          <p:nvPr/>
+        </p:nvSpPr>
+        <p:spPr>
+          <a:xfrm>
+            <a:off x="1417320" y="4325112"/>
+            <a:ext cx="10058400" cy="320040"/>
+          </a:xfrm>
+          <a:prstGeom prst="rect">
+            <a:avLst/>
+          </a:prstGeom>
+          <a:noFill/>
+        </p:spPr>
+        <p:txBody>
+          <a:bodyPr wrap="square" lIns="45720" rIns="45720" anchor="t">
+            <a:spAutoFit/>
+          </a:bodyPr>
+          <a:lstStyle/>
+          <a:p>
+            <a:pPr algn="l"/>
+            <a:r>
+              <a:rPr sz="1300" b="0" i="0">
+                <a:solidFill>
+                  <a:srgbClr val="333333"/>
+                </a:solidFill>
+                <a:latin typeface="Calibri"/>
+              </a:rPr>
+              <a:t>top tells you who; perf tells you what they're doing</a:t>
+            </a:r>
+          </a:p>
+        </p:txBody>
+      </p:sp>
+      <p:sp>
+        <p:nvSpPr>
+          <p:cNvPr id="16" name="Rounded Rectangle 15"/>
+          <p:cNvSpPr/>
+          <p:nvPr/>
+        </p:nvSpPr>
+        <p:spPr>
+          <a:xfrm>
+            <a:off x="822960" y="4727448"/>
+            <a:ext cx="457200" cy="548640"/>
+          </a:xfrm>
+          <a:prstGeom prst="roundRect">
+            <a:avLst/>
+          </a:prstGeom>
+          <a:solidFill>
+            <a:srgbClr val="CC0066"/>
+          </a:solidFill>
+          <a:ln>
+            <a:noFill/>
+          </a:ln>
+          <a:effectLst/>
+        </p:spPr>
+        <p:style>
+          <a:lnRef idx="1">
+            <a:schemeClr val="accent1"/>
+          </a:lnRef>
+          <a:fillRef idx="3">
+            <a:schemeClr val="accent1"/>
+          </a:fillRef>
+          <a:effectRef idx="2">
+            <a:schemeClr val="accent1"/>
+          </a:effectRef>
+          <a:fontRef idx="minor">
+            <a:schemeClr val="lt1"/>
+          </a:fontRef>
+        </p:style>
+        <p:txBody>
+          <a:bodyPr lIns="0" rIns="0" rtlCol="0" anchor="ctr"/>
+          <a:lstStyle/>
+          <a:p>
+            <a:pPr algn="ctr"/>
+            <a:r>
+              <a:rPr sz="2200" b="1">
+                <a:solidFill>
+                  <a:srgbClr val="FFFFFF"/>
+                </a:solidFill>
+                <a:latin typeface="Calibri"/>
+              </a:rPr>
+              <a:t>5</a:t>
+            </a:r>
+          </a:p>
+        </p:txBody>
+      </p:sp>
+      <p:sp>
+        <p:nvSpPr>
+          <p:cNvPr id="17" name="TextBox 16"/>
+          <p:cNvSpPr txBox="1"/>
+          <p:nvPr/>
+        </p:nvSpPr>
+        <p:spPr>
+          <a:xfrm>
+            <a:off x="1417320" y="4727448"/>
+            <a:ext cx="10058400" cy="320040"/>
+          </a:xfrm>
+          <a:prstGeom prst="rect">
+            <a:avLst/>
+          </a:prstGeom>
+          <a:noFill/>
+        </p:spPr>
+        <p:txBody>
+          <a:bodyPr wrap="square" lIns="45720" rIns="45720" anchor="t">
+            <a:spAutoFit/>
+          </a:bodyPr>
+          <a:lstStyle/>
+          <a:p>
+            <a:pPr algn="l"/>
+            <a:r>
+              <a:rPr sz="1600" b="1" i="0">
+                <a:solidFill>
+                  <a:srgbClr val="663399"/>
+                </a:solidFill>
+                <a:latin typeface="Calibri"/>
+              </a:rPr>
+              <a:t>I/O is often the hidden cost</a:t>
+            </a:r>
+          </a:p>
+        </p:txBody>
+      </p:sp>
+      <p:sp>
+        <p:nvSpPr>
+          <p:cNvPr id="18" name="TextBox 17"/>
+          <p:cNvSpPr txBox="1"/>
+          <p:nvPr/>
+        </p:nvSpPr>
+        <p:spPr>
+          <a:xfrm>
+            <a:off x="1417320" y="5038344"/>
+            <a:ext cx="10058400" cy="320040"/>
+          </a:xfrm>
+          <a:prstGeom prst="rect">
+            <a:avLst/>
+          </a:prstGeom>
+          <a:noFill/>
+        </p:spPr>
+        <p:txBody>
+          <a:bodyPr wrap="square" lIns="45720" rIns="45720" anchor="t">
+            <a:spAutoFit/>
+          </a:bodyPr>
+          <a:lstStyle/>
+          <a:p>
+            <a:pPr algn="l"/>
+            <a:r>
+              <a:rPr sz="1300" b="0" i="0">
+                <a:solidFill>
+                  <a:srgbClr val="333333"/>
+                </a:solidFill>
+                <a:latin typeface="Calibri"/>
+              </a:rPr>
+              <a:t>iotop + iostat to find culprits; usually fsync-heavy apps or SD card stalls</a:t>
+            </a:r>
+          </a:p>
+        </p:txBody>
+      </p:sp>
+      <p:sp>
+        <p:nvSpPr>
+          <p:cNvPr id="19" name="Rounded Rectangle 18"/>
+          <p:cNvSpPr/>
+          <p:nvPr/>
+        </p:nvSpPr>
+        <p:spPr>
+          <a:xfrm>
+            <a:off x="822960" y="5669280"/>
+            <a:ext cx="10561320" cy="640080"/>
+          </a:xfrm>
+          <a:prstGeom prst="roundRect">
+            <a:avLst/>
+          </a:prstGeom>
+          <a:solidFill>
+            <a:srgbClr val="FBE6F0"/>
+          </a:solidFill>
+          <a:ln>
+            <a:noFill/>
+          </a:ln>
+          <a:effectLst/>
+        </p:spPr>
+        <p:style>
+          <a:lnRef idx="1">
+            <a:schemeClr val="accent1"/>
+          </a:lnRef>
+          <a:fillRef idx="3">
+            <a:schemeClr val="accent1"/>
+          </a:fillRef>
+          <a:effectRef idx="2">
+            <a:schemeClr val="accent1"/>
+          </a:effectRef>
+          <a:fontRef idx="minor">
+            <a:schemeClr val="lt1"/>
+          </a:fontRef>
+        </p:style>
+        <p:txBody>
+          <a:bodyPr lIns="228600" rtlCol="0" anchor="ctr"/>
+          <a:lstStyle/>
+          <a:p>
+            <a:pPr algn="ctr"/>
+            <a:r>
+              <a:rPr sz="1400" b="1">
+                <a:solidFill>
+                  <a:srgbClr val="663399"/>
+                </a:solidFill>
+                <a:latin typeface="Calibri"/>
+              </a:rPr>
+              <a:t>Next session  →  </a:t>
+            </a:r>
+            <a:r>
+              <a:rPr sz="1400">
+                <a:solidFill>
+                  <a:srgbClr val="333333"/>
+                </a:solidFill>
+                <a:latin typeface="Calibri"/>
+              </a:rPr>
+              <a:t>Updating and Maintaining Devices (45 min)</a:t>
             </a:r>
           </a:p>
         </p:txBody>
